--- a/Presentacion Proyecto Capstone_ Bug Hunter.pptx
+++ b/Presentacion Proyecto Capstone_ Bug Hunter.pptx
@@ -23,23 +23,24 @@
     <p:sldId id="268" r:id="rId18"/>
     <p:sldId id="269" r:id="rId19"/>
     <p:sldId id="270" r:id="rId20"/>
+    <p:sldId id="271" r:id="rId21"/>
   </p:sldIdLst>
   <p:sldSz cy="5143500" cx="9144000"/>
   <p:notesSz cx="6858000" cy="9144000"/>
   <p:embeddedFontLst>
     <p:embeddedFont>
       <p:font typeface="Raleway"/>
-      <p:regular r:id="rId21"/>
-      <p:bold r:id="rId22"/>
-      <p:italic r:id="rId23"/>
-      <p:boldItalic r:id="rId24"/>
+      <p:regular r:id="rId22"/>
+      <p:bold r:id="rId23"/>
+      <p:italic r:id="rId24"/>
+      <p:boldItalic r:id="rId25"/>
     </p:embeddedFont>
     <p:embeddedFont>
       <p:font typeface="Lato"/>
-      <p:regular r:id="rId25"/>
-      <p:bold r:id="rId26"/>
-      <p:italic r:id="rId27"/>
-      <p:boldItalic r:id="rId28"/>
+      <p:regular r:id="rId26"/>
+      <p:bold r:id="rId27"/>
+      <p:italic r:id="rId28"/>
+      <p:boldItalic r:id="rId29"/>
     </p:embeddedFont>
   </p:embeddedFontLst>
   <p:defaultTextStyle>
@@ -820,7 +821,7 @@
   <p:cSld>
     <p:spTree>
       <p:nvGrpSpPr>
-        <p:cNvPr id="165" name="Shape 165"/>
+        <p:cNvPr id="158" name="Shape 158"/>
         <p:cNvGrpSpPr/>
         <p:nvPr/>
       </p:nvGrpSpPr>
@@ -834,7 +835,7 @@
       </p:grpSpPr>
       <p:sp>
         <p:nvSpPr>
-          <p:cNvPr id="166" name="Google Shape;166;g3f9b2e530d6_0_190:notes"/>
+          <p:cNvPr id="159" name="Google Shape;159;g3f9b2e530d6_0_184:notes"/>
           <p:cNvSpPr/>
           <p:nvPr>
             <p:ph idx="2" type="sldImg"/>
@@ -869,7 +870,7 @@
       </p:sp>
       <p:sp>
         <p:nvSpPr>
-          <p:cNvPr id="167" name="Google Shape;167;g3f9b2e530d6_0_190:notes"/>
+          <p:cNvPr id="160" name="Google Shape;160;g3f9b2e530d6_0_184:notes"/>
           <p:cNvSpPr txBox="1"/>
           <p:nvPr>
             <p:ph idx="1" type="body"/>
@@ -933,7 +934,7 @@
       </p:grpSpPr>
       <p:sp>
         <p:nvSpPr>
-          <p:cNvPr id="173" name="Google Shape;173;g3f9b2e530d6_0_196:notes"/>
+          <p:cNvPr id="173" name="Google Shape;173;g3f9b2e530d6_0_190:notes"/>
           <p:cNvSpPr/>
           <p:nvPr>
             <p:ph idx="2" type="sldImg"/>
@@ -968,7 +969,7 @@
       </p:sp>
       <p:sp>
         <p:nvSpPr>
-          <p:cNvPr id="174" name="Google Shape;174;g3f9b2e530d6_0_196:notes"/>
+          <p:cNvPr id="174" name="Google Shape;174;g3f9b2e530d6_0_190:notes"/>
           <p:cNvSpPr txBox="1"/>
           <p:nvPr>
             <p:ph idx="1" type="body"/>
@@ -1032,7 +1033,7 @@
       </p:grpSpPr>
       <p:sp>
         <p:nvSpPr>
-          <p:cNvPr id="180" name="Google Shape;180;g3f9b2e530d6_0_202:notes"/>
+          <p:cNvPr id="180" name="Google Shape;180;g3f9b2e530d6_0_196:notes"/>
           <p:cNvSpPr/>
           <p:nvPr>
             <p:ph idx="2" type="sldImg"/>
@@ -1067,7 +1068,7 @@
       </p:sp>
       <p:sp>
         <p:nvSpPr>
-          <p:cNvPr id="181" name="Google Shape;181;g3f9b2e530d6_0_202:notes"/>
+          <p:cNvPr id="181" name="Google Shape;181;g3f9b2e530d6_0_196:notes"/>
           <p:cNvSpPr txBox="1"/>
           <p:nvPr>
             <p:ph idx="1" type="body"/>
@@ -1131,7 +1132,7 @@
       </p:grpSpPr>
       <p:sp>
         <p:nvSpPr>
-          <p:cNvPr id="187" name="Google Shape;187;g3f9b2e530d6_0_218:notes"/>
+          <p:cNvPr id="187" name="Google Shape;187;g3f9b2e530d6_0_202:notes"/>
           <p:cNvSpPr/>
           <p:nvPr>
             <p:ph idx="2" type="sldImg"/>
@@ -1166,7 +1167,7 @@
       </p:sp>
       <p:sp>
         <p:nvSpPr>
-          <p:cNvPr id="188" name="Google Shape;188;g3f9b2e530d6_0_218:notes"/>
+          <p:cNvPr id="188" name="Google Shape;188;g3f9b2e530d6_0_202:notes"/>
           <p:cNvSpPr txBox="1"/>
           <p:nvPr>
             <p:ph idx="1" type="body"/>
@@ -1216,7 +1217,7 @@
   <p:cSld>
     <p:spTree>
       <p:nvGrpSpPr>
-        <p:cNvPr id="195" name="Shape 195"/>
+        <p:cNvPr id="193" name="Shape 193"/>
         <p:cNvGrpSpPr/>
         <p:nvPr/>
       </p:nvGrpSpPr>
@@ -1230,7 +1231,7 @@
       </p:grpSpPr>
       <p:sp>
         <p:nvSpPr>
-          <p:cNvPr id="196" name="Google Shape;196;g3f9b2e530d6_0_223:notes"/>
+          <p:cNvPr id="194" name="Google Shape;194;g3f9b2e530d6_0_218:notes"/>
           <p:cNvSpPr/>
           <p:nvPr>
             <p:ph idx="2" type="sldImg"/>
@@ -1265,7 +1266,7 @@
       </p:sp>
       <p:sp>
         <p:nvSpPr>
-          <p:cNvPr id="197" name="Google Shape;197;g3f9b2e530d6_0_223:notes"/>
+          <p:cNvPr id="195" name="Google Shape;195;g3f9b2e530d6_0_218:notes"/>
           <p:cNvSpPr txBox="1"/>
           <p:nvPr>
             <p:ph idx="1" type="body"/>
@@ -1315,7 +1316,7 @@
   <p:cSld>
     <p:spTree>
       <p:nvGrpSpPr>
-        <p:cNvPr id="204" name="Shape 204"/>
+        <p:cNvPr id="202" name="Shape 202"/>
         <p:cNvGrpSpPr/>
         <p:nvPr/>
       </p:nvGrpSpPr>
@@ -1329,7 +1330,7 @@
       </p:grpSpPr>
       <p:sp>
         <p:nvSpPr>
-          <p:cNvPr id="205" name="Google Shape;205;g3f9b2e530d6_0_228:notes"/>
+          <p:cNvPr id="203" name="Google Shape;203;g3f9b2e530d6_0_223:notes"/>
           <p:cNvSpPr/>
           <p:nvPr>
             <p:ph idx="2" type="sldImg"/>
@@ -1364,7 +1365,106 @@
       </p:sp>
       <p:sp>
         <p:nvSpPr>
-          <p:cNvPr id="206" name="Google Shape;206;g3f9b2e530d6_0_228:notes"/>
+          <p:cNvPr id="204" name="Google Shape;204;g3f9b2e530d6_0_223:notes"/>
+          <p:cNvSpPr txBox="1"/>
+          <p:nvPr>
+            <p:ph idx="1" type="body"/>
+          </p:nvPr>
+        </p:nvSpPr>
+        <p:spPr>
+          <a:xfrm>
+            <a:off x="685800" y="4343400"/>
+            <a:ext cx="5486400" cy="4114800"/>
+          </a:xfrm>
+          <a:prstGeom prst="rect">
+            <a:avLst/>
+          </a:prstGeom>
+        </p:spPr>
+        <p:txBody>
+          <a:bodyPr anchorCtr="0" anchor="t" bIns="91425" lIns="91425" spcFirstLastPara="1" rIns="91425" wrap="square" tIns="91425">
+            <a:noAutofit/>
+          </a:bodyPr>
+          <a:lstStyle/>
+          <a:p>
+            <a:pPr indent="0" lvl="0" marL="0" rtl="0" algn="l">
+              <a:spcBef>
+                <a:spcPts val="0"/>
+              </a:spcBef>
+              <a:spcAft>
+                <a:spcPts val="0"/>
+              </a:spcAft>
+              <a:buNone/>
+            </a:pPr>
+            <a:r>
+              <a:t/>
+            </a:r>
+            <a:endParaRPr/>
+          </a:p>
+        </p:txBody>
+      </p:sp>
+    </p:spTree>
+  </p:cSld>
+  <p:clrMapOvr>
+    <a:masterClrMapping/>
+  </p:clrMapOvr>
+</p:notes>
+</file>
+
+<file path=ppt/notesSlides/notesSlide16.xml><?xml version="1.0" encoding="utf-8"?>
+<p:notes xmlns:a="http://schemas.openxmlformats.org/drawingml/2006/main" xmlns:r="http://schemas.openxmlformats.org/officeDocument/2006/relationships" xmlns:mc="http://schemas.openxmlformats.org/markup-compatibility/2006" xmlns:mv="urn:schemas-microsoft-com:mac:vml" xmlns:p="http://schemas.openxmlformats.org/presentationml/2006/main" xmlns:c="http://schemas.openxmlformats.org/drawingml/2006/chart" xmlns:dgm="http://schemas.openxmlformats.org/drawingml/2006/diagram" xmlns:o="urn:schemas-microsoft-com:office:office" xmlns:v="urn:schemas-microsoft-com:vml" xmlns:pvml="urn:schemas-microsoft-com:office:powerpoint" xmlns:com="http://schemas.openxmlformats.org/drawingml/2006/compatibility" xmlns:p14="http://schemas.microsoft.com/office/powerpoint/2010/main" xmlns:p15="http://schemas.microsoft.com/office/powerpoint/2012/main" xmlns:ahyp="http://schemas.microsoft.com/office/drawing/2018/hyperlinkcolor" showMasterPhAnim="0" showMasterSp="0">
+  <p:cSld>
+    <p:spTree>
+      <p:nvGrpSpPr>
+        <p:cNvPr id="211" name="Shape 211"/>
+        <p:cNvGrpSpPr/>
+        <p:nvPr/>
+      </p:nvGrpSpPr>
+      <p:grpSpPr>
+        <a:xfrm>
+          <a:off x="0" y="0"/>
+          <a:ext cx="0" cy="0"/>
+          <a:chOff x="0" y="0"/>
+          <a:chExt cx="0" cy="0"/>
+        </a:xfrm>
+      </p:grpSpPr>
+      <p:sp>
+        <p:nvSpPr>
+          <p:cNvPr id="212" name="Google Shape;212;g3f9b2e530d6_0_228:notes"/>
+          <p:cNvSpPr/>
+          <p:nvPr>
+            <p:ph idx="2" type="sldImg"/>
+          </p:nvPr>
+        </p:nvSpPr>
+        <p:spPr>
+          <a:xfrm>
+            <a:off x="381300" y="685800"/>
+            <a:ext cx="6096000" cy="3429000"/>
+          </a:xfrm>
+          <a:custGeom>
+            <a:rect b="b" l="l" r="r" t="t"/>
+            <a:pathLst>
+              <a:path extrusionOk="0" h="120000" w="120000">
+                <a:moveTo>
+                  <a:pt x="0" y="0"/>
+                </a:moveTo>
+                <a:lnTo>
+                  <a:pt x="120000" y="0"/>
+                </a:lnTo>
+                <a:lnTo>
+                  <a:pt x="120000" y="120000"/>
+                </a:lnTo>
+                <a:lnTo>
+                  <a:pt x="0" y="120000"/>
+                </a:lnTo>
+                <a:close/>
+              </a:path>
+            </a:pathLst>
+          </a:custGeom>
+        </p:spPr>
+      </p:sp>
+      <p:sp>
+        <p:nvSpPr>
+          <p:cNvPr id="213" name="Google Shape;213;g3f9b2e530d6_0_228:notes"/>
           <p:cNvSpPr txBox="1"/>
           <p:nvPr>
             <p:ph idx="1" type="body"/>
@@ -2022,7 +2122,7 @@
       </p:grpSpPr>
       <p:sp>
         <p:nvSpPr>
-          <p:cNvPr id="143" name="Google Shape;143;g3f9b2e530d6_0_290:notes"/>
+          <p:cNvPr id="143" name="Google Shape;143;g3f9b2e530d6_4_5:notes"/>
           <p:cNvSpPr/>
           <p:nvPr>
             <p:ph idx="2" type="sldImg"/>
@@ -2057,7 +2157,7 @@
       </p:sp>
       <p:sp>
         <p:nvSpPr>
-          <p:cNvPr id="144" name="Google Shape;144;g3f9b2e530d6_0_290:notes"/>
+          <p:cNvPr id="144" name="Google Shape;144;g3f9b2e530d6_4_5:notes"/>
           <p:cNvSpPr txBox="1"/>
           <p:nvPr>
             <p:ph idx="1" type="body"/>
@@ -2107,7 +2207,7 @@
   <p:cSld>
     <p:spTree>
       <p:nvGrpSpPr>
-        <p:cNvPr id="151" name="Shape 151"/>
+        <p:cNvPr id="149" name="Shape 149"/>
         <p:cNvGrpSpPr/>
         <p:nvPr/>
       </p:nvGrpSpPr>
@@ -2121,7 +2221,7 @@
       </p:grpSpPr>
       <p:sp>
         <p:nvSpPr>
-          <p:cNvPr id="152" name="Google Shape;152;g3f9b2e530d6_0_184:notes"/>
+          <p:cNvPr id="150" name="Google Shape;150;g3f9b2e530d6_0_290:notes"/>
           <p:cNvSpPr/>
           <p:nvPr>
             <p:ph idx="2" type="sldImg"/>
@@ -2156,7 +2256,7 @@
       </p:sp>
       <p:sp>
         <p:nvSpPr>
-          <p:cNvPr id="153" name="Google Shape;153;g3f9b2e530d6_0_184:notes"/>
+          <p:cNvPr id="151" name="Google Shape;151;g3f9b2e530d6_0_290:notes"/>
           <p:cNvSpPr txBox="1"/>
           <p:nvPr>
             <p:ph idx="1" type="body"/>
@@ -8723,7 +8823,7 @@
   <p:cSld>
     <p:spTree>
       <p:nvGrpSpPr>
-        <p:cNvPr id="168" name="Shape 168"/>
+        <p:cNvPr id="161" name="Shape 161"/>
         <p:cNvGrpSpPr/>
         <p:nvPr/>
       </p:nvGrpSpPr>
@@ -8737,7 +8837,7 @@
       </p:grpSpPr>
       <p:pic>
         <p:nvPicPr>
-          <p:cNvPr id="169" name="Google Shape;169;p22"/>
+          <p:cNvPr id="162" name="Google Shape;162;p22"/>
           <p:cNvPicPr preferRelativeResize="0"/>
           <p:nvPr/>
         </p:nvPicPr>
@@ -8765,7 +8865,7 @@
       </p:pic>
       <p:sp>
         <p:nvSpPr>
-          <p:cNvPr id="170" name="Google Shape;170;p22"/>
+          <p:cNvPr id="163" name="Google Shape;163;p22"/>
           <p:cNvSpPr txBox="1"/>
           <p:nvPr>
             <p:ph type="title"/>
@@ -8797,7 +8897,7 @@
             </a:pPr>
             <a:r>
               <a:rPr lang="es"/>
-              <a:t>Competencias</a:t>
+              <a:t>Arquitectura</a:t>
             </a:r>
             <a:r>
               <a:rPr lang="es"/>
@@ -8824,7 +8924,7 @@
       </p:sp>
       <p:sp>
         <p:nvSpPr>
-          <p:cNvPr id="171" name="Google Shape;171;p22"/>
+          <p:cNvPr id="164" name="Google Shape;164;p22"/>
           <p:cNvSpPr txBox="1"/>
           <p:nvPr>
             <p:ph idx="1" type="body"/>
@@ -8832,112 +8932,123 @@
         </p:nvSpPr>
         <p:spPr>
           <a:xfrm>
-            <a:off x="727650" y="1330725"/>
-            <a:ext cx="7747800" cy="3407400"/>
+            <a:off x="608175" y="1291200"/>
+            <a:ext cx="3215700" cy="3407400"/>
           </a:xfrm>
           <a:prstGeom prst="rect">
             <a:avLst/>
           </a:prstGeom>
         </p:spPr>
         <p:txBody>
-          <a:bodyPr anchorCtr="0" anchor="t" bIns="91425" lIns="91425" spcFirstLastPara="1" rIns="91425" wrap="square" tIns="91425">
-            <a:normAutofit fontScale="25000" lnSpcReduction="20000"/>
+          <a:bodyPr anchorCtr="0" anchor="ctr" bIns="91425" lIns="91425" spcFirstLastPara="1" rIns="91425" wrap="square" tIns="91425">
+            <a:normAutofit/>
           </a:bodyPr>
           <a:lstStyle/>
           <a:p>
-            <a:pPr indent="-332236" lvl="0" marL="457200" rtl="0" algn="l">
+            <a:pPr indent="0" lvl="0" marL="457200" rtl="0" algn="l">
+              <a:lnSpc>
+                <a:spcPct val="100000"/>
+              </a:lnSpc>
+              <a:spcBef>
+                <a:spcPts val="1000"/>
+              </a:spcBef>
+              <a:spcAft>
+                <a:spcPts val="0"/>
+              </a:spcAft>
+              <a:buNone/>
+            </a:pPr>
+            <a:r>
+              <a:t/>
+            </a:r>
+            <a:endParaRPr sz="1600"/>
+          </a:p>
+          <a:p>
+            <a:pPr indent="-330200" lvl="0" marL="457200" rtl="0" algn="l">
               <a:lnSpc>
                 <a:spcPct val="150000"/>
               </a:lnSpc>
               <a:spcBef>
-                <a:spcPts val="1000"/>
-              </a:spcBef>
-              <a:spcAft>
-                <a:spcPts val="0"/>
-              </a:spcAft>
-              <a:buSzPct val="100000"/>
+                <a:spcPts val="0"/>
+              </a:spcBef>
+              <a:spcAft>
+                <a:spcPts val="0"/>
+              </a:spcAft>
+              <a:buSzPts val="1600"/>
               <a:buChar char="●"/>
             </a:pPr>
             <a:r>
-              <a:rPr lang="es" sz="6528"/>
-              <a:t>Desarrollo Full-Stack: Dominio integral de interfaces, lógica de servidor, APIs y bases de datos relacionales.</a:t>
-            </a:r>
-            <a:endParaRPr sz="6528"/>
-          </a:p>
-          <a:p>
-            <a:pPr indent="-332236" lvl="0" marL="457200" rtl="0" algn="l">
+              <a:rPr lang="es" sz="1600"/>
+              <a:t>Frontend</a:t>
+            </a:r>
+            <a:endParaRPr sz="1600"/>
+          </a:p>
+          <a:p>
+            <a:pPr indent="-330200" lvl="0" marL="457200" rtl="0" algn="l">
               <a:lnSpc>
                 <a:spcPct val="150000"/>
               </a:lnSpc>
               <a:spcBef>
-                <a:spcPts val="1000"/>
-              </a:spcBef>
-              <a:spcAft>
-                <a:spcPts val="0"/>
-              </a:spcAft>
-              <a:buSzPct val="100000"/>
+                <a:spcPts val="0"/>
+              </a:spcBef>
+              <a:spcAft>
+                <a:spcPts val="0"/>
+              </a:spcAft>
+              <a:buSzPts val="1600"/>
               <a:buChar char="●"/>
             </a:pPr>
             <a:r>
-              <a:rPr lang="es" sz="6528"/>
-              <a:t>Control de versiones avanzado: Uso profesional de Git y GitHub para flujos de trabajo colaborativos reales.</a:t>
-            </a:r>
-            <a:endParaRPr sz="6528"/>
-          </a:p>
-          <a:p>
-            <a:pPr indent="-332236" lvl="0" marL="457200" rtl="0" algn="l">
+              <a:rPr lang="es" sz="1600"/>
+              <a:t>Lógica</a:t>
+            </a:r>
+            <a:r>
+              <a:rPr lang="es" sz="1600"/>
+              <a:t> y </a:t>
+            </a:r>
+            <a:r>
+              <a:rPr lang="es" sz="1600"/>
+              <a:t>Validación</a:t>
+            </a:r>
+            <a:endParaRPr sz="1600"/>
+          </a:p>
+          <a:p>
+            <a:pPr indent="-330200" lvl="0" marL="457200" rtl="0" algn="l">
               <a:lnSpc>
                 <a:spcPct val="150000"/>
               </a:lnSpc>
               <a:spcBef>
-                <a:spcPts val="1000"/>
-              </a:spcBef>
-              <a:spcAft>
-                <a:spcPts val="0"/>
-              </a:spcAft>
-              <a:buSzPct val="100000"/>
+                <a:spcPts val="0"/>
+              </a:spcBef>
+              <a:spcAft>
+                <a:spcPts val="0"/>
+              </a:spcAft>
+              <a:buSzPts val="1600"/>
               <a:buChar char="●"/>
             </a:pPr>
             <a:r>
-              <a:rPr lang="es" sz="6528"/>
-              <a:t>Gestión ágil: Aplicación práctica de metodologías ágiles mediante entregas incrementales y adaptación de sprints.</a:t>
-            </a:r>
-            <a:endParaRPr sz="6528"/>
-          </a:p>
-          <a:p>
-            <a:pPr indent="-332236" lvl="0" marL="457200" rtl="0" algn="l">
+              <a:rPr lang="es" sz="1600"/>
+              <a:t>Persistencia</a:t>
+            </a:r>
+            <a:endParaRPr sz="1600"/>
+          </a:p>
+          <a:p>
+            <a:pPr indent="-330200" lvl="0" marL="457200" rtl="0" algn="l">
               <a:lnSpc>
                 <a:spcPct val="150000"/>
               </a:lnSpc>
               <a:spcBef>
-                <a:spcPts val="1000"/>
-              </a:spcBef>
-              <a:spcAft>
-                <a:spcPts val="0"/>
-              </a:spcAft>
-              <a:buSzPct val="100000"/>
+                <a:spcPts val="0"/>
+              </a:spcBef>
+              <a:spcAft>
+                <a:spcPts val="0"/>
+              </a:spcAft>
+              <a:buSzPts val="1600"/>
               <a:buChar char="●"/>
             </a:pPr>
             <a:r>
-              <a:rPr lang="es" sz="6528"/>
-              <a:t>Arquitectura y seguridad: Implementación de un diseño de software modular, limpio y seguro.</a:t>
-            </a:r>
-            <a:endParaRPr sz="6528"/>
-          </a:p>
-          <a:p>
-            <a:pPr indent="0" lvl="0" marL="0" rtl="0" algn="l">
-              <a:spcBef>
-                <a:spcPts val="1000"/>
-              </a:spcBef>
-              <a:spcAft>
-                <a:spcPts val="0"/>
-              </a:spcAft>
-              <a:buNone/>
-            </a:pPr>
-            <a:r>
-              <a:t/>
-            </a:r>
-            <a:endParaRPr sz="6528"/>
+              <a:rPr lang="es" sz="1600"/>
+              <a:t>Seguridad e Identidad</a:t>
+            </a:r>
+            <a:endParaRPr sz="1600"/>
           </a:p>
           <a:p>
             <a:pPr indent="0" lvl="0" marL="0" rtl="0" algn="l">
@@ -8956,6 +9067,202 @@
           </a:p>
         </p:txBody>
       </p:sp>
+      <p:pic>
+        <p:nvPicPr>
+          <p:cNvPr id="165" name="Google Shape;165;p22"/>
+          <p:cNvPicPr preferRelativeResize="0"/>
+          <p:nvPr/>
+        </p:nvPicPr>
+        <p:blipFill>
+          <a:blip r:embed="rId4">
+            <a:alphaModFix/>
+          </a:blip>
+          <a:stretch>
+            <a:fillRect/>
+          </a:stretch>
+        </p:blipFill>
+        <p:spPr>
+          <a:xfrm>
+            <a:off x="6823351" y="756001"/>
+            <a:ext cx="1471350" cy="1471350"/>
+          </a:xfrm>
+          <a:prstGeom prst="rect">
+            <a:avLst/>
+          </a:prstGeom>
+          <a:noFill/>
+          <a:ln>
+            <a:noFill/>
+          </a:ln>
+        </p:spPr>
+      </p:pic>
+      <p:pic>
+        <p:nvPicPr>
+          <p:cNvPr id="166" name="Google Shape;166;p22"/>
+          <p:cNvPicPr preferRelativeResize="0"/>
+          <p:nvPr/>
+        </p:nvPicPr>
+        <p:blipFill>
+          <a:blip r:embed="rId5">
+            <a:alphaModFix/>
+          </a:blip>
+          <a:stretch>
+            <a:fillRect/>
+          </a:stretch>
+        </p:blipFill>
+        <p:spPr>
+          <a:xfrm>
+            <a:off x="7548226" y="1955800"/>
+            <a:ext cx="746475" cy="615951"/>
+          </a:xfrm>
+          <a:prstGeom prst="rect">
+            <a:avLst/>
+          </a:prstGeom>
+          <a:noFill/>
+          <a:ln>
+            <a:noFill/>
+          </a:ln>
+        </p:spPr>
+      </p:pic>
+      <p:pic>
+        <p:nvPicPr>
+          <p:cNvPr id="167" name="Google Shape;167;p22"/>
+          <p:cNvPicPr preferRelativeResize="0"/>
+          <p:nvPr/>
+        </p:nvPicPr>
+        <p:blipFill>
+          <a:blip r:embed="rId6">
+            <a:alphaModFix/>
+          </a:blip>
+          <a:stretch>
+            <a:fillRect/>
+          </a:stretch>
+        </p:blipFill>
+        <p:spPr>
+          <a:xfrm>
+            <a:off x="6704823" y="1955790"/>
+            <a:ext cx="615950" cy="615950"/>
+          </a:xfrm>
+          <a:prstGeom prst="rect">
+            <a:avLst/>
+          </a:prstGeom>
+          <a:noFill/>
+          <a:ln>
+            <a:noFill/>
+          </a:ln>
+        </p:spPr>
+      </p:pic>
+      <p:pic>
+        <p:nvPicPr>
+          <p:cNvPr id="168" name="Google Shape;168;p22"/>
+          <p:cNvPicPr preferRelativeResize="0"/>
+          <p:nvPr/>
+        </p:nvPicPr>
+        <p:blipFill>
+          <a:blip r:embed="rId7">
+            <a:alphaModFix/>
+          </a:blip>
+          <a:stretch>
+            <a:fillRect/>
+          </a:stretch>
+        </p:blipFill>
+        <p:spPr>
+          <a:xfrm>
+            <a:off x="6704827" y="3092630"/>
+            <a:ext cx="615950" cy="635195"/>
+          </a:xfrm>
+          <a:prstGeom prst="rect">
+            <a:avLst/>
+          </a:prstGeom>
+          <a:noFill/>
+          <a:ln>
+            <a:noFill/>
+          </a:ln>
+        </p:spPr>
+      </p:pic>
+      <p:pic>
+        <p:nvPicPr>
+          <p:cNvPr id="169" name="Google Shape;169;p22"/>
+          <p:cNvPicPr preferRelativeResize="0"/>
+          <p:nvPr/>
+        </p:nvPicPr>
+        <p:blipFill>
+          <a:blip r:embed="rId8">
+            <a:alphaModFix/>
+          </a:blip>
+          <a:stretch>
+            <a:fillRect/>
+          </a:stretch>
+        </p:blipFill>
+        <p:spPr>
+          <a:xfrm>
+            <a:off x="7444149" y="3164840"/>
+            <a:ext cx="1166301" cy="490750"/>
+          </a:xfrm>
+          <a:prstGeom prst="rect">
+            <a:avLst/>
+          </a:prstGeom>
+          <a:noFill/>
+          <a:ln>
+            <a:noFill/>
+          </a:ln>
+        </p:spPr>
+      </p:pic>
+      <p:pic>
+        <p:nvPicPr>
+          <p:cNvPr id="170" name="Google Shape;170;p22"/>
+          <p:cNvPicPr preferRelativeResize="0"/>
+          <p:nvPr/>
+        </p:nvPicPr>
+        <p:blipFill>
+          <a:blip r:embed="rId9">
+            <a:alphaModFix/>
+          </a:blip>
+          <a:stretch>
+            <a:fillRect/>
+          </a:stretch>
+        </p:blipFill>
+        <p:spPr>
+          <a:xfrm>
+            <a:off x="6672201" y="4067962"/>
+            <a:ext cx="681200" cy="752037"/>
+          </a:xfrm>
+          <a:prstGeom prst="rect">
+            <a:avLst/>
+          </a:prstGeom>
+          <a:noFill/>
+          <a:ln>
+            <a:noFill/>
+          </a:ln>
+        </p:spPr>
+      </p:pic>
+      <p:pic>
+        <p:nvPicPr>
+          <p:cNvPr id="171" name="Google Shape;171;p22"/>
+          <p:cNvPicPr preferRelativeResize="0"/>
+          <p:nvPr/>
+        </p:nvPicPr>
+        <p:blipFill>
+          <a:blip r:embed="rId10">
+            <a:alphaModFix/>
+          </a:blip>
+          <a:stretch>
+            <a:fillRect/>
+          </a:stretch>
+        </p:blipFill>
+        <p:spPr>
+          <a:xfrm>
+            <a:off x="7686701" y="4102572"/>
+            <a:ext cx="681200" cy="682803"/>
+          </a:xfrm>
+          <a:prstGeom prst="rect">
+            <a:avLst/>
+          </a:prstGeom>
+          <a:noFill/>
+          <a:ln>
+            <a:noFill/>
+          </a:ln>
+        </p:spPr>
+      </p:pic>
     </p:spTree>
   </p:cSld>
   <p:clrMapOvr>
@@ -9043,7 +9350,7 @@
             </a:pPr>
             <a:r>
               <a:rPr lang="es"/>
-              <a:t>Riesgos</a:t>
+              <a:t>Competencias</a:t>
             </a:r>
             <a:r>
               <a:rPr lang="es"/>
@@ -9079,7 +9386,7 @@
         <p:spPr>
           <a:xfrm>
             <a:off x="727650" y="1330725"/>
-            <a:ext cx="7688700" cy="3407400"/>
+            <a:ext cx="7747800" cy="3407400"/>
           </a:xfrm>
           <a:prstGeom prst="rect">
             <a:avLst/>
@@ -9087,11 +9394,11 @@
         </p:spPr>
         <p:txBody>
           <a:bodyPr anchorCtr="0" anchor="t" bIns="91425" lIns="91425" spcFirstLastPara="1" rIns="91425" wrap="square" tIns="91425">
-            <a:noAutofit/>
+            <a:normAutofit fontScale="25000" lnSpcReduction="20000"/>
           </a:bodyPr>
           <a:lstStyle/>
           <a:p>
-            <a:pPr indent="-330200" lvl="0" marL="457200" rtl="0" algn="l">
+            <a:pPr indent="-332236" lvl="0" marL="457200" rtl="0" algn="l">
               <a:lnSpc>
                 <a:spcPct val="150000"/>
               </a:lnSpc>
@@ -9101,17 +9408,17 @@
               <a:spcAft>
                 <a:spcPts val="0"/>
               </a:spcAft>
-              <a:buSzPts val="1600"/>
+              <a:buSzPct val="100000"/>
               <a:buChar char="●"/>
             </a:pPr>
             <a:r>
-              <a:rPr lang="es" sz="1600"/>
-              <a:t>Fraude académico: Mitigado con autenticación dual obligatoria (GitHub + cuenta institucional Duoc/Microsoft) para eliminar el anonimato.</a:t>
-            </a:r>
-            <a:endParaRPr sz="1600"/>
-          </a:p>
-          <a:p>
-            <a:pPr indent="-330200" lvl="0" marL="457200" rtl="0" algn="l">
+              <a:rPr lang="es" sz="6528"/>
+              <a:t>Desarrollo Full-Stack: Dominio integral de interfaces, lógica de servidor, APIs y bases de datos relacionales.</a:t>
+            </a:r>
+            <a:endParaRPr sz="6528"/>
+          </a:p>
+          <a:p>
+            <a:pPr indent="-332236" lvl="0" marL="457200" rtl="0" algn="l">
               <a:lnSpc>
                 <a:spcPct val="150000"/>
               </a:lnSpc>
@@ -9121,17 +9428,17 @@
               <a:spcAft>
                 <a:spcPts val="0"/>
               </a:spcAft>
-              <a:buSzPts val="1600"/>
+              <a:buSzPct val="100000"/>
               <a:buChar char="●"/>
             </a:pPr>
             <a:r>
-              <a:rPr lang="es" sz="1600"/>
-              <a:t>Abandono de tareas: Controlado mediante timeouts automáticos por inactividad y colas de alumnos en reserva.</a:t>
-            </a:r>
-            <a:endParaRPr sz="1600"/>
-          </a:p>
-          <a:p>
-            <a:pPr indent="-330200" lvl="0" marL="457200" rtl="0" algn="l">
+              <a:rPr lang="es" sz="6528"/>
+              <a:t>Control de versiones avanzado: Uso profesional de Git y GitHub para flujos de trabajo colaborativos reales.</a:t>
+            </a:r>
+            <a:endParaRPr sz="6528"/>
+          </a:p>
+          <a:p>
+            <a:pPr indent="-332236" lvl="0" marL="457200" rtl="0" algn="l">
               <a:lnSpc>
                 <a:spcPct val="150000"/>
               </a:lnSpc>
@@ -9141,17 +9448,17 @@
               <a:spcAft>
                 <a:spcPts val="0"/>
               </a:spcAft>
-              <a:buSzPts val="1600"/>
+              <a:buSzPct val="100000"/>
               <a:buChar char="●"/>
             </a:pPr>
             <a:r>
-              <a:rPr lang="es" sz="1600"/>
-              <a:t>Sobrecarga de trabajo: Restricción de postulaciones simultáneas en paralelo según el nivel de avance del usuario.</a:t>
-            </a:r>
-            <a:endParaRPr sz="1600"/>
-          </a:p>
-          <a:p>
-            <a:pPr indent="-330200" lvl="0" marL="457200" rtl="0" algn="l">
+              <a:rPr lang="es" sz="6528"/>
+              <a:t>Gestión ágil: Aplicación práctica de metodologías ágiles mediante entregas incrementales y adaptación de sprints.</a:t>
+            </a:r>
+            <a:endParaRPr sz="6528"/>
+          </a:p>
+          <a:p>
+            <a:pPr indent="-332236" lvl="0" marL="457200" rtl="0" algn="l">
               <a:lnSpc>
                 <a:spcPct val="150000"/>
               </a:lnSpc>
@@ -9161,14 +9468,14 @@
               <a:spcAft>
                 <a:spcPts val="0"/>
               </a:spcAft>
-              <a:buSzPts val="1600"/>
+              <a:buSzPct val="100000"/>
               <a:buChar char="●"/>
             </a:pPr>
             <a:r>
-              <a:rPr lang="es" sz="1600"/>
-              <a:t>Brecha técnica inicial: Abordada mediante una sección de mini tutoriales interactivos de Git y GitHub integrados.</a:t>
-            </a:r>
-            <a:endParaRPr sz="1600"/>
+              <a:rPr lang="es" sz="6528"/>
+              <a:t>Arquitectura y seguridad: Implementación de un diseño de software modular, limpio y seguro.</a:t>
+            </a:r>
+            <a:endParaRPr sz="6528"/>
           </a:p>
           <a:p>
             <a:pPr indent="0" lvl="0" marL="0" rtl="0" algn="l">
@@ -9289,7 +9596,11 @@
             </a:pPr>
             <a:r>
               <a:rPr lang="es"/>
-              <a:t>Seguridad</a:t>
+              <a:t>Riesgos</a:t>
+            </a:r>
+            <a:r>
+              <a:rPr lang="es"/>
+              <a:t>	</a:t>
             </a:r>
             <a:endParaRPr/>
           </a:p>
@@ -9320,7 +9631,7 @@
         </p:nvSpPr>
         <p:spPr>
           <a:xfrm>
-            <a:off x="727650" y="1291200"/>
+            <a:off x="727650" y="1330725"/>
             <a:ext cx="7688700" cy="3407400"/>
           </a:xfrm>
           <a:prstGeom prst="rect">
@@ -9328,12 +9639,12 @@
           </a:prstGeom>
         </p:spPr>
         <p:txBody>
-          <a:bodyPr anchorCtr="0" anchor="ctr" bIns="91425" lIns="91425" spcFirstLastPara="1" rIns="91425" wrap="square" tIns="91425">
+          <a:bodyPr anchorCtr="0" anchor="t" bIns="91425" lIns="91425" spcFirstLastPara="1" rIns="91425" wrap="square" tIns="91425">
             <a:noAutofit/>
           </a:bodyPr>
           <a:lstStyle/>
           <a:p>
-            <a:pPr indent="-317740" lvl="0" marL="457200" rtl="0" algn="l">
+            <a:pPr indent="-330200" lvl="0" marL="457200" rtl="0" algn="l">
               <a:lnSpc>
                 <a:spcPct val="150000"/>
               </a:lnSpc>
@@ -9343,139 +9654,94 @@
               <a:spcAft>
                 <a:spcPts val="0"/>
               </a:spcAft>
-              <a:buSzPts val="1404"/>
+              <a:buSzPts val="1600"/>
               <a:buChar char="●"/>
             </a:pPr>
             <a:r>
-              <a:rPr lang="es" sz="1404"/>
-              <a:t>Autenticación dual: Github + cuenta institucional Duoc UC.</a:t>
-            </a:r>
-            <a:endParaRPr sz="1404"/>
-          </a:p>
-          <a:p>
-            <a:pPr indent="-317740" lvl="0" marL="457200" rtl="0" algn="l">
+              <a:rPr lang="es" sz="1600"/>
+              <a:t>Fraude académico: Mitigado con autenticación dual obligatoria (GitHub + cuenta institucional Duoc/Microsoft) para eliminar el anonimato.</a:t>
+            </a:r>
+            <a:endParaRPr sz="1600"/>
+          </a:p>
+          <a:p>
+            <a:pPr indent="-330200" lvl="0" marL="457200" rtl="0" algn="l">
               <a:lnSpc>
                 <a:spcPct val="150000"/>
               </a:lnSpc>
               <a:spcBef>
-                <a:spcPts val="0"/>
-              </a:spcBef>
-              <a:spcAft>
-                <a:spcPts val="0"/>
-              </a:spcAft>
-              <a:buSzPts val="1404"/>
+                <a:spcPts val="1000"/>
+              </a:spcBef>
+              <a:spcAft>
+                <a:spcPts val="0"/>
+              </a:spcAft>
+              <a:buSzPts val="1600"/>
               <a:buChar char="●"/>
             </a:pPr>
             <a:r>
-              <a:rPr lang="es" sz="1404"/>
-              <a:t>Control de acceso  por roles</a:t>
-            </a:r>
-            <a:endParaRPr sz="1404"/>
-          </a:p>
-          <a:p>
-            <a:pPr indent="-317740" lvl="0" marL="457200" rtl="0" algn="l">
+              <a:rPr lang="es" sz="1600"/>
+              <a:t>Abandono de tareas: Controlado mediante timeouts automáticos por inactividad y colas de alumnos en reserva.</a:t>
+            </a:r>
+            <a:endParaRPr sz="1600"/>
+          </a:p>
+          <a:p>
+            <a:pPr indent="-330200" lvl="0" marL="457200" rtl="0" algn="l">
               <a:lnSpc>
                 <a:spcPct val="150000"/>
               </a:lnSpc>
               <a:spcBef>
-                <a:spcPts val="0"/>
-              </a:spcBef>
-              <a:spcAft>
-                <a:spcPts val="0"/>
-              </a:spcAft>
-              <a:buSzPts val="1404"/>
+                <a:spcPts val="1000"/>
+              </a:spcBef>
+              <a:spcAft>
+                <a:spcPts val="0"/>
+              </a:spcAft>
+              <a:buSzPts val="1600"/>
               <a:buChar char="●"/>
             </a:pPr>
             <a:r>
-              <a:rPr lang="es" sz="1404"/>
-              <a:t>Protección de Webshock: validación mediante  HMAC.</a:t>
-            </a:r>
-            <a:endParaRPr sz="1404"/>
-          </a:p>
-          <a:p>
-            <a:pPr indent="-317740" lvl="0" marL="457200" rtl="0" algn="l">
+              <a:rPr lang="es" sz="1600"/>
+              <a:t>Sobrecarga de trabajo: Restricción de postulaciones simultáneas en paralelo según el nivel de avance del usuario.</a:t>
+            </a:r>
+            <a:endParaRPr sz="1600"/>
+          </a:p>
+          <a:p>
+            <a:pPr indent="-330200" lvl="0" marL="457200" rtl="0" algn="l">
               <a:lnSpc>
                 <a:spcPct val="150000"/>
               </a:lnSpc>
               <a:spcBef>
-                <a:spcPts val="0"/>
-              </a:spcBef>
-              <a:spcAft>
-                <a:spcPts val="0"/>
-              </a:spcAft>
-              <a:buSzPts val="1404"/>
+                <a:spcPts val="1000"/>
+              </a:spcBef>
+              <a:spcAft>
+                <a:spcPts val="0"/>
+              </a:spcAft>
+              <a:buSzPts val="1600"/>
               <a:buChar char="●"/>
             </a:pPr>
             <a:r>
-              <a:rPr lang="es" sz="1404"/>
-              <a:t>Validación de Datos: uso de Zod para evitar información inválida o maliciosa.</a:t>
-            </a:r>
-            <a:endParaRPr sz="1404"/>
-          </a:p>
-          <a:p>
-            <a:pPr indent="-317740" lvl="0" marL="457200" rtl="0" algn="l">
-              <a:lnSpc>
-                <a:spcPct val="150000"/>
-              </a:lnSpc>
-              <a:spcBef>
-                <a:spcPts val="0"/>
-              </a:spcBef>
-              <a:spcAft>
-                <a:spcPts val="0"/>
-              </a:spcAft>
-              <a:buSzPts val="1404"/>
-              <a:buChar char="●"/>
-            </a:pPr>
-            <a:r>
-              <a:rPr lang="es" sz="1404"/>
-              <a:t>Protección de Credenciales: uso de variables de entorno para datos sensibles.</a:t>
-            </a:r>
-            <a:endParaRPr sz="1404"/>
-          </a:p>
-          <a:p>
-            <a:pPr indent="-317740" lvl="0" marL="457200" rtl="0" algn="l">
-              <a:lnSpc>
-                <a:spcPct val="150000"/>
-              </a:lnSpc>
-              <a:spcBef>
-                <a:spcPts val="0"/>
-              </a:spcBef>
-              <a:spcAft>
-                <a:spcPts val="0"/>
-              </a:spcAft>
-              <a:buSzPts val="1404"/>
-              <a:buChar char="●"/>
-            </a:pPr>
-            <a:r>
-              <a:rPr lang="es" sz="1404"/>
-              <a:t>Auditoría: registro de actividades y eventos importantes.</a:t>
-            </a:r>
-            <a:endParaRPr sz="1404"/>
-          </a:p>
-          <a:p>
-            <a:pPr indent="-317740" lvl="0" marL="457200" rtl="0" algn="l">
-              <a:lnSpc>
-                <a:spcPct val="150000"/>
-              </a:lnSpc>
-              <a:spcBef>
-                <a:spcPts val="0"/>
-              </a:spcBef>
-              <a:spcAft>
-                <a:spcPts val="0"/>
-              </a:spcAft>
-              <a:buSzPts val="1404"/>
-              <a:buChar char="●"/>
-            </a:pPr>
-            <a:r>
-              <a:rPr lang="es" sz="1404"/>
-              <a:t>Con esto buscamos la identidad de los usuarios, la información de las tareas y las comunicación  con GitHub.</a:t>
+              <a:rPr lang="es" sz="1600"/>
+              <a:t>Brecha técnica inicial: Abordada mediante una sección de mini tutoriales interactivos de Git y GitHub integrados.</a:t>
+            </a:r>
+            <a:endParaRPr sz="1600"/>
+          </a:p>
+          <a:p>
+            <a:pPr indent="0" lvl="0" marL="0" rtl="0" algn="l">
+              <a:spcBef>
+                <a:spcPts val="1000"/>
+              </a:spcBef>
+              <a:spcAft>
+                <a:spcPts val="0"/>
+              </a:spcAft>
+              <a:buNone/>
+            </a:pPr>
+            <a:r>
+              <a:t/>
             </a:r>
             <a:endParaRPr sz="6528"/>
           </a:p>
           <a:p>
             <a:pPr indent="0" lvl="0" marL="0" rtl="0" algn="l">
               <a:spcBef>
-                <a:spcPts val="0"/>
+                <a:spcPts val="1200"/>
               </a:spcBef>
               <a:spcAft>
                 <a:spcPts val="1200"/>
@@ -9552,7 +9818,7 @@
         </p:nvSpPr>
         <p:spPr>
           <a:xfrm>
-            <a:off x="727650" y="756538"/>
+            <a:off x="727650" y="756000"/>
             <a:ext cx="7688700" cy="535200"/>
           </a:xfrm>
           <a:prstGeom prst="rect">
@@ -9576,11 +9842,7 @@
             </a:pPr>
             <a:r>
               <a:rPr lang="es"/>
-              <a:t>Modelo de negocio</a:t>
-            </a:r>
-            <a:r>
-              <a:rPr lang="es"/>
-              <a:t>	</a:t>
+              <a:t>Seguridad</a:t>
             </a:r>
             <a:endParaRPr/>
           </a:p>
@@ -9604,6 +9866,297 @@
       <p:sp>
         <p:nvSpPr>
           <p:cNvPr id="192" name="Google Shape;192;p25"/>
+          <p:cNvSpPr txBox="1"/>
+          <p:nvPr>
+            <p:ph idx="1" type="body"/>
+          </p:nvPr>
+        </p:nvSpPr>
+        <p:spPr>
+          <a:xfrm>
+            <a:off x="727650" y="1291200"/>
+            <a:ext cx="7688700" cy="3407400"/>
+          </a:xfrm>
+          <a:prstGeom prst="rect">
+            <a:avLst/>
+          </a:prstGeom>
+        </p:spPr>
+        <p:txBody>
+          <a:bodyPr anchorCtr="0" anchor="ctr" bIns="91425" lIns="91425" spcFirstLastPara="1" rIns="91425" wrap="square" tIns="91425">
+            <a:noAutofit/>
+          </a:bodyPr>
+          <a:lstStyle/>
+          <a:p>
+            <a:pPr indent="-317740" lvl="0" marL="457200" rtl="0" algn="l">
+              <a:lnSpc>
+                <a:spcPct val="150000"/>
+              </a:lnSpc>
+              <a:spcBef>
+                <a:spcPts val="1000"/>
+              </a:spcBef>
+              <a:spcAft>
+                <a:spcPts val="0"/>
+              </a:spcAft>
+              <a:buSzPts val="1404"/>
+              <a:buChar char="●"/>
+            </a:pPr>
+            <a:r>
+              <a:rPr lang="es" sz="1404"/>
+              <a:t>Autenticación dual: Github + cuenta institucional Duoc UC.</a:t>
+            </a:r>
+            <a:endParaRPr sz="1404"/>
+          </a:p>
+          <a:p>
+            <a:pPr indent="-317740" lvl="0" marL="457200" rtl="0" algn="l">
+              <a:lnSpc>
+                <a:spcPct val="150000"/>
+              </a:lnSpc>
+              <a:spcBef>
+                <a:spcPts val="0"/>
+              </a:spcBef>
+              <a:spcAft>
+                <a:spcPts val="0"/>
+              </a:spcAft>
+              <a:buSzPts val="1404"/>
+              <a:buChar char="●"/>
+            </a:pPr>
+            <a:r>
+              <a:rPr lang="es" sz="1404"/>
+              <a:t>Control de acceso  por roles</a:t>
+            </a:r>
+            <a:endParaRPr sz="1404"/>
+          </a:p>
+          <a:p>
+            <a:pPr indent="-317740" lvl="0" marL="457200" rtl="0" algn="l">
+              <a:lnSpc>
+                <a:spcPct val="150000"/>
+              </a:lnSpc>
+              <a:spcBef>
+                <a:spcPts val="0"/>
+              </a:spcBef>
+              <a:spcAft>
+                <a:spcPts val="0"/>
+              </a:spcAft>
+              <a:buSzPts val="1404"/>
+              <a:buChar char="●"/>
+            </a:pPr>
+            <a:r>
+              <a:rPr lang="es" sz="1404"/>
+              <a:t>Protección de Webshock: validación mediante  HMAC.</a:t>
+            </a:r>
+            <a:endParaRPr sz="1404"/>
+          </a:p>
+          <a:p>
+            <a:pPr indent="-317740" lvl="0" marL="457200" rtl="0" algn="l">
+              <a:lnSpc>
+                <a:spcPct val="150000"/>
+              </a:lnSpc>
+              <a:spcBef>
+                <a:spcPts val="0"/>
+              </a:spcBef>
+              <a:spcAft>
+                <a:spcPts val="0"/>
+              </a:spcAft>
+              <a:buSzPts val="1404"/>
+              <a:buChar char="●"/>
+            </a:pPr>
+            <a:r>
+              <a:rPr lang="es" sz="1404"/>
+              <a:t>Validación de Datos: uso de Zod para evitar información inválida o maliciosa.</a:t>
+            </a:r>
+            <a:endParaRPr sz="1404"/>
+          </a:p>
+          <a:p>
+            <a:pPr indent="-317740" lvl="0" marL="457200" rtl="0" algn="l">
+              <a:lnSpc>
+                <a:spcPct val="150000"/>
+              </a:lnSpc>
+              <a:spcBef>
+                <a:spcPts val="0"/>
+              </a:spcBef>
+              <a:spcAft>
+                <a:spcPts val="0"/>
+              </a:spcAft>
+              <a:buSzPts val="1404"/>
+              <a:buChar char="●"/>
+            </a:pPr>
+            <a:r>
+              <a:rPr lang="es" sz="1404"/>
+              <a:t>Protección de Credenciales: uso de variables de entorno para datos sensibles.</a:t>
+            </a:r>
+            <a:endParaRPr sz="1404"/>
+          </a:p>
+          <a:p>
+            <a:pPr indent="-317740" lvl="0" marL="457200" rtl="0" algn="l">
+              <a:lnSpc>
+                <a:spcPct val="150000"/>
+              </a:lnSpc>
+              <a:spcBef>
+                <a:spcPts val="0"/>
+              </a:spcBef>
+              <a:spcAft>
+                <a:spcPts val="0"/>
+              </a:spcAft>
+              <a:buSzPts val="1404"/>
+              <a:buChar char="●"/>
+            </a:pPr>
+            <a:r>
+              <a:rPr lang="es" sz="1404"/>
+              <a:t>Auditoría: registro de actividades y eventos importantes.</a:t>
+            </a:r>
+            <a:endParaRPr sz="1404"/>
+          </a:p>
+          <a:p>
+            <a:pPr indent="-317740" lvl="0" marL="457200" rtl="0" algn="l">
+              <a:lnSpc>
+                <a:spcPct val="150000"/>
+              </a:lnSpc>
+              <a:spcBef>
+                <a:spcPts val="0"/>
+              </a:spcBef>
+              <a:spcAft>
+                <a:spcPts val="0"/>
+              </a:spcAft>
+              <a:buSzPts val="1404"/>
+              <a:buChar char="●"/>
+            </a:pPr>
+            <a:r>
+              <a:rPr lang="es" sz="1404"/>
+              <a:t>Con esto buscamos la identidad de los usuarios, la información de las tareas y las comunicación  con GitHub.</a:t>
+            </a:r>
+            <a:endParaRPr sz="6528"/>
+          </a:p>
+          <a:p>
+            <a:pPr indent="0" lvl="0" marL="0" rtl="0" algn="l">
+              <a:spcBef>
+                <a:spcPts val="0"/>
+              </a:spcBef>
+              <a:spcAft>
+                <a:spcPts val="1200"/>
+              </a:spcAft>
+              <a:buNone/>
+            </a:pPr>
+            <a:r>
+              <a:t/>
+            </a:r>
+            <a:endParaRPr/>
+          </a:p>
+        </p:txBody>
+      </p:sp>
+    </p:spTree>
+  </p:cSld>
+  <p:clrMapOvr>
+    <a:masterClrMapping/>
+  </p:clrMapOvr>
+</p:sld>
+</file>
+
+<file path=ppt/slides/slide14.xml><?xml version="1.0" encoding="utf-8"?>
+<p:sld xmlns:a="http://schemas.openxmlformats.org/drawingml/2006/main" xmlns:r="http://schemas.openxmlformats.org/officeDocument/2006/relationships" xmlns:mc="http://schemas.openxmlformats.org/markup-compatibility/2006" xmlns:mv="urn:schemas-microsoft-com:mac:vml" xmlns:p="http://schemas.openxmlformats.org/presentationml/2006/main" xmlns:c="http://schemas.openxmlformats.org/drawingml/2006/chart" xmlns:dgm="http://schemas.openxmlformats.org/drawingml/2006/diagram" xmlns:o="urn:schemas-microsoft-com:office:office" xmlns:v="urn:schemas-microsoft-com:vml" xmlns:pvml="urn:schemas-microsoft-com:office:powerpoint" xmlns:com="http://schemas.openxmlformats.org/drawingml/2006/compatibility" xmlns:p14="http://schemas.microsoft.com/office/powerpoint/2010/main" xmlns:p15="http://schemas.microsoft.com/office/powerpoint/2012/main" xmlns:ahyp="http://schemas.microsoft.com/office/drawing/2018/hyperlinkcolor">
+  <p:cSld>
+    <p:spTree>
+      <p:nvGrpSpPr>
+        <p:cNvPr id="196" name="Shape 196"/>
+        <p:cNvGrpSpPr/>
+        <p:nvPr/>
+      </p:nvGrpSpPr>
+      <p:grpSpPr>
+        <a:xfrm>
+          <a:off x="0" y="0"/>
+          <a:ext cx="0" cy="0"/>
+          <a:chOff x="0" y="0"/>
+          <a:chExt cx="0" cy="0"/>
+        </a:xfrm>
+      </p:grpSpPr>
+      <p:pic>
+        <p:nvPicPr>
+          <p:cNvPr id="197" name="Google Shape;197;p26"/>
+          <p:cNvPicPr preferRelativeResize="0"/>
+          <p:nvPr/>
+        </p:nvPicPr>
+        <p:blipFill>
+          <a:blip r:embed="rId3">
+            <a:alphaModFix/>
+          </a:blip>
+          <a:stretch>
+            <a:fillRect/>
+          </a:stretch>
+        </p:blipFill>
+        <p:spPr>
+          <a:xfrm>
+            <a:off x="7147725" y="0"/>
+            <a:ext cx="1996274" cy="490750"/>
+          </a:xfrm>
+          <a:prstGeom prst="rect">
+            <a:avLst/>
+          </a:prstGeom>
+          <a:noFill/>
+          <a:ln>
+            <a:noFill/>
+          </a:ln>
+        </p:spPr>
+      </p:pic>
+      <p:sp>
+        <p:nvSpPr>
+          <p:cNvPr id="198" name="Google Shape;198;p26"/>
+          <p:cNvSpPr txBox="1"/>
+          <p:nvPr>
+            <p:ph type="title"/>
+          </p:nvPr>
+        </p:nvSpPr>
+        <p:spPr>
+          <a:xfrm>
+            <a:off x="727650" y="756538"/>
+            <a:ext cx="7688700" cy="535200"/>
+          </a:xfrm>
+          <a:prstGeom prst="rect">
+            <a:avLst/>
+          </a:prstGeom>
+        </p:spPr>
+        <p:txBody>
+          <a:bodyPr anchorCtr="0" anchor="t" bIns="91425" lIns="91425" spcFirstLastPara="1" rIns="91425" wrap="square" tIns="91425">
+            <a:normAutofit fontScale="90000"/>
+          </a:bodyPr>
+          <a:lstStyle/>
+          <a:p>
+            <a:pPr indent="0" lvl="0" marL="0" rtl="0" algn="l">
+              <a:spcBef>
+                <a:spcPts val="0"/>
+              </a:spcBef>
+              <a:spcAft>
+                <a:spcPts val="0"/>
+              </a:spcAft>
+              <a:buNone/>
+            </a:pPr>
+            <a:r>
+              <a:rPr lang="es"/>
+              <a:t>Modelo de negocio</a:t>
+            </a:r>
+            <a:r>
+              <a:rPr lang="es"/>
+              <a:t>	</a:t>
+            </a:r>
+            <a:endParaRPr/>
+          </a:p>
+          <a:p>
+            <a:pPr indent="0" lvl="0" marL="0" rtl="0" algn="l">
+              <a:spcBef>
+                <a:spcPts val="0"/>
+              </a:spcBef>
+              <a:spcAft>
+                <a:spcPts val="0"/>
+              </a:spcAft>
+              <a:buNone/>
+            </a:pPr>
+            <a:r>
+              <a:t/>
+            </a:r>
+            <a:endParaRPr/>
+          </a:p>
+        </p:txBody>
+      </p:sp>
+      <p:sp>
+        <p:nvSpPr>
+          <p:cNvPr id="199" name="Google Shape;199;p26"/>
           <p:cNvSpPr txBox="1"/>
           <p:nvPr>
             <p:ph idx="1" type="body"/>
@@ -9658,7 +10211,7 @@
       </p:sp>
       <p:sp>
         <p:nvSpPr>
-          <p:cNvPr id="193" name="Google Shape;193;p25"/>
+          <p:cNvPr id="200" name="Google Shape;200;p26"/>
           <p:cNvSpPr txBox="1"/>
           <p:nvPr>
             <p:ph idx="1" type="body"/>
@@ -9713,7 +10266,7 @@
       </p:sp>
       <p:sp>
         <p:nvSpPr>
-          <p:cNvPr id="194" name="Google Shape;194;p25"/>
+          <p:cNvPr id="201" name="Google Shape;201;p26"/>
           <p:cNvSpPr txBox="1"/>
           <p:nvPr/>
         </p:nvSpPr>
@@ -9894,12 +10447,12 @@
 </p:sld>
 </file>
 
-<file path=ppt/slides/slide14.xml><?xml version="1.0" encoding="utf-8"?>
+<file path=ppt/slides/slide15.xml><?xml version="1.0" encoding="utf-8"?>
 <p:sld xmlns:a="http://schemas.openxmlformats.org/drawingml/2006/main" xmlns:r="http://schemas.openxmlformats.org/officeDocument/2006/relationships" xmlns:mc="http://schemas.openxmlformats.org/markup-compatibility/2006" xmlns:mv="urn:schemas-microsoft-com:mac:vml" xmlns:p="http://schemas.openxmlformats.org/presentationml/2006/main" xmlns:c="http://schemas.openxmlformats.org/drawingml/2006/chart" xmlns:dgm="http://schemas.openxmlformats.org/drawingml/2006/diagram" xmlns:o="urn:schemas-microsoft-com:office:office" xmlns:v="urn:schemas-microsoft-com:vml" xmlns:pvml="urn:schemas-microsoft-com:office:powerpoint" xmlns:com="http://schemas.openxmlformats.org/drawingml/2006/compatibility" xmlns:p14="http://schemas.microsoft.com/office/powerpoint/2010/main" xmlns:p15="http://schemas.microsoft.com/office/powerpoint/2012/main" xmlns:ahyp="http://schemas.microsoft.com/office/drawing/2018/hyperlinkcolor">
   <p:cSld>
     <p:spTree>
       <p:nvGrpSpPr>
-        <p:cNvPr id="198" name="Shape 198"/>
+        <p:cNvPr id="205" name="Shape 205"/>
         <p:cNvGrpSpPr/>
         <p:nvPr/>
       </p:nvGrpSpPr>
@@ -9913,7 +10466,7 @@
       </p:grpSpPr>
       <p:pic>
         <p:nvPicPr>
-          <p:cNvPr id="199" name="Google Shape;199;p26"/>
+          <p:cNvPr id="206" name="Google Shape;206;p27"/>
           <p:cNvPicPr preferRelativeResize="0"/>
           <p:nvPr/>
         </p:nvPicPr>
@@ -9941,7 +10494,7 @@
       </p:pic>
       <p:sp>
         <p:nvSpPr>
-          <p:cNvPr id="200" name="Google Shape;200;p26"/>
+          <p:cNvPr id="207" name="Google Shape;207;p27"/>
           <p:cNvSpPr txBox="1"/>
           <p:nvPr>
             <p:ph type="title"/>
@@ -10000,7 +10553,7 @@
       </p:sp>
       <p:pic>
         <p:nvPicPr>
-          <p:cNvPr id="201" name="Google Shape;201;p26"/>
+          <p:cNvPr id="208" name="Google Shape;208;p27"/>
           <p:cNvPicPr preferRelativeResize="0"/>
           <p:nvPr/>
         </p:nvPicPr>
@@ -10028,7 +10581,7 @@
       </p:pic>
       <p:pic>
         <p:nvPicPr>
-          <p:cNvPr id="202" name="Google Shape;202;p26"/>
+          <p:cNvPr id="209" name="Google Shape;209;p27"/>
           <p:cNvPicPr preferRelativeResize="0"/>
           <p:nvPr/>
         </p:nvPicPr>
@@ -10056,7 +10609,7 @@
       </p:pic>
       <p:pic>
         <p:nvPicPr>
-          <p:cNvPr id="203" name="Google Shape;203;p26"/>
+          <p:cNvPr id="210" name="Google Shape;210;p27"/>
           <p:cNvPicPr preferRelativeResize="0"/>
           <p:nvPr/>
         </p:nvPicPr>
@@ -10070,7 +10623,7 @@
         </p:blipFill>
         <p:spPr>
           <a:xfrm>
-            <a:off x="2140025" y="459575"/>
+            <a:off x="2128475" y="490750"/>
             <a:ext cx="7841626" cy="4039249"/>
           </a:xfrm>
           <a:prstGeom prst="rect">
@@ -10121,7 +10674,7 @@
                                           </p:stCondLst>
                                         </p:cTn>
                                         <p:tgtEl>
-                                          <p:spTgt spid="202"/>
+                                          <p:spTgt spid="209"/>
                                         </p:tgtEl>
                                         <p:attrNameLst>
                                           <p:attrName>style.visibility</p:attrName>
@@ -10148,7 +10701,7 @@
                                           </p:stCondLst>
                                         </p:cTn>
                                         <p:tgtEl>
-                                          <p:spTgt spid="201"/>
+                                          <p:spTgt spid="208"/>
                                         </p:tgtEl>
                                         <p:attrNameLst>
                                           <p:attrName>style.visibility</p:attrName>
@@ -10193,7 +10746,7 @@
                                           </p:stCondLst>
                                         </p:cTn>
                                         <p:tgtEl>
-                                          <p:spTgt spid="203"/>
+                                          <p:spTgt spid="210"/>
                                         </p:tgtEl>
                                         <p:attrNameLst>
                                           <p:attrName>style.visibility</p:attrName>
@@ -10220,7 +10773,7 @@
                                           </p:stCondLst>
                                         </p:cTn>
                                         <p:tgtEl>
-                                          <p:spTgt spid="202"/>
+                                          <p:spTgt spid="209"/>
                                         </p:tgtEl>
                                         <p:attrNameLst>
                                           <p:attrName>style.visibility</p:attrName>
@@ -10264,12 +10817,12 @@
 </p:sld>
 </file>
 
-<file path=ppt/slides/slide15.xml><?xml version="1.0" encoding="utf-8"?>
+<file path=ppt/slides/slide16.xml><?xml version="1.0" encoding="utf-8"?>
 <p:sld xmlns:a="http://schemas.openxmlformats.org/drawingml/2006/main" xmlns:r="http://schemas.openxmlformats.org/officeDocument/2006/relationships" xmlns:mc="http://schemas.openxmlformats.org/markup-compatibility/2006" xmlns:mv="urn:schemas-microsoft-com:mac:vml" xmlns:p="http://schemas.openxmlformats.org/presentationml/2006/main" xmlns:c="http://schemas.openxmlformats.org/drawingml/2006/chart" xmlns:dgm="http://schemas.openxmlformats.org/drawingml/2006/diagram" xmlns:o="urn:schemas-microsoft-com:office:office" xmlns:v="urn:schemas-microsoft-com:vml" xmlns:pvml="urn:schemas-microsoft-com:office:powerpoint" xmlns:com="http://schemas.openxmlformats.org/drawingml/2006/compatibility" xmlns:p14="http://schemas.microsoft.com/office/powerpoint/2010/main" xmlns:p15="http://schemas.microsoft.com/office/powerpoint/2012/main" xmlns:ahyp="http://schemas.microsoft.com/office/drawing/2018/hyperlinkcolor">
   <p:cSld>
     <p:spTree>
       <p:nvGrpSpPr>
-        <p:cNvPr id="207" name="Shape 207"/>
+        <p:cNvPr id="214" name="Shape 214"/>
         <p:cNvGrpSpPr/>
         <p:nvPr/>
       </p:nvGrpSpPr>
@@ -10283,7 +10836,7 @@
       </p:grpSpPr>
       <p:pic>
         <p:nvPicPr>
-          <p:cNvPr id="208" name="Google Shape;208;p27"/>
+          <p:cNvPr id="215" name="Google Shape;215;p28"/>
           <p:cNvPicPr preferRelativeResize="0"/>
           <p:nvPr/>
         </p:nvPicPr>
@@ -10311,7 +10864,7 @@
       </p:pic>
       <p:sp>
         <p:nvSpPr>
-          <p:cNvPr id="209" name="Google Shape;209;p27"/>
+          <p:cNvPr id="216" name="Google Shape;216;p28"/>
           <p:cNvSpPr txBox="1"/>
           <p:nvPr>
             <p:ph type="title"/>
@@ -10370,7 +10923,7 @@
       </p:sp>
       <p:sp>
         <p:nvSpPr>
-          <p:cNvPr id="210" name="Google Shape;210;p27"/>
+          <p:cNvPr id="217" name="Google Shape;217;p28"/>
           <p:cNvSpPr txBox="1"/>
           <p:nvPr>
             <p:ph idx="1" type="body"/>
@@ -12378,7 +12931,22 @@
             </a:pPr>
             <a:r>
               <a:rPr lang="es"/>
-              <a:t>Plan</a:t>
+              <a:t>Roles</a:t>
+            </a:r>
+            <a:endParaRPr/>
+          </a:p>
+          <a:p>
+            <a:pPr indent="0" lvl="0" marL="0" rtl="0" algn="l">
+              <a:spcBef>
+                <a:spcPts val="0"/>
+              </a:spcBef>
+              <a:spcAft>
+                <a:spcPts val="0"/>
+              </a:spcAft>
+              <a:buNone/>
+            </a:pPr>
+            <a:r>
+              <a:t/>
             </a:r>
             <a:endParaRPr/>
           </a:p>
@@ -12399,24 +12967,16 @@
           </a:p>
         </p:txBody>
       </p:sp>
-      <p:pic>
-        <p:nvPicPr>
+      <p:sp>
+        <p:nvSpPr>
           <p:cNvPr id="148" name="Google Shape;148;p20"/>
-          <p:cNvPicPr preferRelativeResize="0"/>
+          <p:cNvSpPr txBox="1"/>
           <p:nvPr/>
-        </p:nvPicPr>
-        <p:blipFill>
-          <a:blip r:embed="rId4">
-            <a:alphaModFix/>
-          </a:blip>
-          <a:stretch>
-            <a:fillRect/>
-          </a:stretch>
-        </p:blipFill>
-        <p:spPr>
-          <a:xfrm>
-            <a:off x="342100" y="1345225"/>
-            <a:ext cx="4294342" cy="3547500"/>
+        </p:nvSpPr>
+        <p:spPr>
+          <a:xfrm>
+            <a:off x="727650" y="1472900"/>
+            <a:ext cx="8250000" cy="3203100"/>
           </a:xfrm>
           <a:prstGeom prst="rect">
             <a:avLst/>
@@ -12426,63 +12986,255 @@
             <a:noFill/>
           </a:ln>
         </p:spPr>
-      </p:pic>
-      <p:pic>
-        <p:nvPicPr>
-          <p:cNvPr id="149" name="Google Shape;149;p20"/>
-          <p:cNvPicPr preferRelativeResize="0"/>
-          <p:nvPr/>
-        </p:nvPicPr>
-        <p:blipFill>
-          <a:blip r:embed="rId5">
-            <a:alphaModFix/>
-          </a:blip>
-          <a:stretch>
-            <a:fillRect/>
-          </a:stretch>
-        </p:blipFill>
-        <p:spPr>
-          <a:xfrm>
-            <a:off x="4636450" y="1653925"/>
-            <a:ext cx="4202749" cy="3197274"/>
-          </a:xfrm>
-          <a:prstGeom prst="rect">
-            <a:avLst/>
-          </a:prstGeom>
-          <a:noFill/>
-          <a:ln>
-            <a:noFill/>
-          </a:ln>
-        </p:spPr>
-      </p:pic>
-      <p:pic>
-        <p:nvPicPr>
-          <p:cNvPr id="150" name="Google Shape;150;p20"/>
-          <p:cNvPicPr preferRelativeResize="0"/>
-          <p:nvPr/>
-        </p:nvPicPr>
-        <p:blipFill>
-          <a:blip r:embed="rId6">
-            <a:alphaModFix/>
-          </a:blip>
-          <a:stretch>
-            <a:fillRect/>
-          </a:stretch>
-        </p:blipFill>
-        <p:spPr>
-          <a:xfrm>
-            <a:off x="4695200" y="1345225"/>
-            <a:ext cx="4105901" cy="365050"/>
-          </a:xfrm>
-          <a:prstGeom prst="rect">
-            <a:avLst/>
-          </a:prstGeom>
-          <a:noFill/>
-          <a:ln>
-            <a:noFill/>
-          </a:ln>
-        </p:spPr>
-      </p:pic>
+        <p:txBody>
+          <a:bodyPr anchorCtr="0" anchor="t" bIns="91425" lIns="91425" spcFirstLastPara="1" rIns="91425" wrap="square" tIns="91425">
+            <a:noAutofit/>
+          </a:bodyPr>
+          <a:lstStyle/>
+          <a:p>
+            <a:pPr indent="0" lvl="0" marL="0" rtl="0" algn="l">
+              <a:lnSpc>
+                <a:spcPct val="115000"/>
+              </a:lnSpc>
+              <a:spcBef>
+                <a:spcPts val="0"/>
+              </a:spcBef>
+              <a:spcAft>
+                <a:spcPts val="0"/>
+              </a:spcAft>
+              <a:buNone/>
+            </a:pPr>
+            <a:r>
+              <a:rPr lang="es" sz="1300">
+                <a:solidFill>
+                  <a:schemeClr val="accent1"/>
+                </a:solidFill>
+                <a:latin typeface="Lato"/>
+                <a:ea typeface="Lato"/>
+                <a:cs typeface="Lato"/>
+                <a:sym typeface="Lato"/>
+              </a:rPr>
+              <a:t>El equipo de trabajo está compuesto por dos integrantes, quienes compartirán responsabilidades transversales relacionadas con el desarrollo, pruebas, documentación y seguimiento del proyecto. No obstante, cada integrante mantendrá un foco principal.</a:t>
+            </a:r>
+            <a:endParaRPr sz="1300">
+              <a:solidFill>
+                <a:schemeClr val="accent1"/>
+              </a:solidFill>
+              <a:latin typeface="Lato"/>
+              <a:ea typeface="Lato"/>
+              <a:cs typeface="Lato"/>
+              <a:sym typeface="Lato"/>
+            </a:endParaRPr>
+          </a:p>
+          <a:p>
+            <a:pPr indent="0" lvl="0" marL="0" rtl="0" algn="l">
+              <a:lnSpc>
+                <a:spcPct val="115000"/>
+              </a:lnSpc>
+              <a:spcBef>
+                <a:spcPts val="0"/>
+              </a:spcBef>
+              <a:spcAft>
+                <a:spcPts val="0"/>
+              </a:spcAft>
+              <a:buNone/>
+            </a:pPr>
+            <a:r>
+              <a:t/>
+            </a:r>
+            <a:endParaRPr sz="1300">
+              <a:solidFill>
+                <a:schemeClr val="accent1"/>
+              </a:solidFill>
+              <a:latin typeface="Lato"/>
+              <a:ea typeface="Lato"/>
+              <a:cs typeface="Lato"/>
+              <a:sym typeface="Lato"/>
+            </a:endParaRPr>
+          </a:p>
+          <a:p>
+            <a:pPr indent="0" lvl="0" marL="0" rtl="0" algn="l">
+              <a:lnSpc>
+                <a:spcPct val="115000"/>
+              </a:lnSpc>
+              <a:spcBef>
+                <a:spcPts val="0"/>
+              </a:spcBef>
+              <a:spcAft>
+                <a:spcPts val="0"/>
+              </a:spcAft>
+              <a:buNone/>
+            </a:pPr>
+            <a:r>
+              <a:rPr b="1" lang="es" sz="1300">
+                <a:solidFill>
+                  <a:schemeClr val="accent1"/>
+                </a:solidFill>
+                <a:latin typeface="Lato"/>
+                <a:ea typeface="Lato"/>
+                <a:cs typeface="Lato"/>
+                <a:sym typeface="Lato"/>
+              </a:rPr>
+              <a:t>Martín Salas (Product Owner &amp; Lead Frontend):</a:t>
+            </a:r>
+            <a:r>
+              <a:rPr lang="es" sz="1300">
+                <a:solidFill>
+                  <a:schemeClr val="accent1"/>
+                </a:solidFill>
+                <a:latin typeface="Lato"/>
+                <a:ea typeface="Lato"/>
+                <a:cs typeface="Lato"/>
+                <a:sym typeface="Lato"/>
+              </a:rPr>
+              <a:t> Liderazgo de la visión de producto, priorización de requerimientos, desarrollo de interfaz en Next.js, UX e interfaz del tutorial de Git/GitHub.</a:t>
+            </a:r>
+            <a:endParaRPr sz="1300">
+              <a:solidFill>
+                <a:schemeClr val="accent1"/>
+              </a:solidFill>
+              <a:latin typeface="Lato"/>
+              <a:ea typeface="Lato"/>
+              <a:cs typeface="Lato"/>
+              <a:sym typeface="Lato"/>
+            </a:endParaRPr>
+          </a:p>
+          <a:p>
+            <a:pPr indent="0" lvl="0" marL="0" rtl="0" algn="l">
+              <a:lnSpc>
+                <a:spcPct val="115000"/>
+              </a:lnSpc>
+              <a:spcBef>
+                <a:spcPts val="0"/>
+              </a:spcBef>
+              <a:spcAft>
+                <a:spcPts val="0"/>
+              </a:spcAft>
+              <a:buNone/>
+            </a:pPr>
+            <a:r>
+              <a:t/>
+            </a:r>
+            <a:endParaRPr sz="1300">
+              <a:solidFill>
+                <a:schemeClr val="accent1"/>
+              </a:solidFill>
+              <a:latin typeface="Lato"/>
+              <a:ea typeface="Lato"/>
+              <a:cs typeface="Lato"/>
+              <a:sym typeface="Lato"/>
+            </a:endParaRPr>
+          </a:p>
+          <a:p>
+            <a:pPr indent="0" lvl="0" marL="0" rtl="0" algn="l">
+              <a:lnSpc>
+                <a:spcPct val="115000"/>
+              </a:lnSpc>
+              <a:spcBef>
+                <a:spcPts val="0"/>
+              </a:spcBef>
+              <a:spcAft>
+                <a:spcPts val="0"/>
+              </a:spcAft>
+              <a:buNone/>
+            </a:pPr>
+            <a:r>
+              <a:rPr b="1" lang="es" sz="1300">
+                <a:solidFill>
+                  <a:schemeClr val="accent1"/>
+                </a:solidFill>
+                <a:latin typeface="Lato"/>
+                <a:ea typeface="Lato"/>
+                <a:cs typeface="Lato"/>
+                <a:sym typeface="Lato"/>
+              </a:rPr>
+              <a:t>Martín Pero (Lead Backend &amp; DevOps):</a:t>
+            </a:r>
+            <a:r>
+              <a:rPr lang="es" sz="1300">
+                <a:solidFill>
+                  <a:schemeClr val="accent1"/>
+                </a:solidFill>
+                <a:latin typeface="Lato"/>
+                <a:ea typeface="Lato"/>
+                <a:cs typeface="Lato"/>
+                <a:sym typeface="Lato"/>
+              </a:rPr>
+              <a:t> Arquitectura del servidor, base de datos con PostgreSQL y Prisma ORM, seguridad con Auth.js, integración de Webhooks y despliegue.</a:t>
+            </a:r>
+            <a:endParaRPr sz="1300">
+              <a:solidFill>
+                <a:schemeClr val="accent1"/>
+              </a:solidFill>
+              <a:latin typeface="Lato"/>
+              <a:ea typeface="Lato"/>
+              <a:cs typeface="Lato"/>
+              <a:sym typeface="Lato"/>
+            </a:endParaRPr>
+          </a:p>
+          <a:p>
+            <a:pPr indent="0" lvl="0" marL="0" rtl="0" algn="l">
+              <a:lnSpc>
+                <a:spcPct val="115000"/>
+              </a:lnSpc>
+              <a:spcBef>
+                <a:spcPts val="0"/>
+              </a:spcBef>
+              <a:spcAft>
+                <a:spcPts val="0"/>
+              </a:spcAft>
+              <a:buNone/>
+            </a:pPr>
+            <a:r>
+              <a:t/>
+            </a:r>
+            <a:endParaRPr sz="1300">
+              <a:solidFill>
+                <a:schemeClr val="accent1"/>
+              </a:solidFill>
+              <a:latin typeface="Lato"/>
+              <a:ea typeface="Lato"/>
+              <a:cs typeface="Lato"/>
+              <a:sym typeface="Lato"/>
+            </a:endParaRPr>
+          </a:p>
+          <a:p>
+            <a:pPr indent="0" lvl="0" marL="0" rtl="0" algn="l">
+              <a:lnSpc>
+                <a:spcPct val="115000"/>
+              </a:lnSpc>
+              <a:spcBef>
+                <a:spcPts val="0"/>
+              </a:spcBef>
+              <a:spcAft>
+                <a:spcPts val="0"/>
+              </a:spcAft>
+              <a:buNone/>
+            </a:pPr>
+            <a:r>
+              <a:rPr lang="es" sz="1300">
+                <a:solidFill>
+                  <a:schemeClr val="accent1"/>
+                </a:solidFill>
+                <a:latin typeface="Lato"/>
+                <a:ea typeface="Lato"/>
+                <a:cs typeface="Lato"/>
+                <a:sym typeface="Lato"/>
+              </a:rPr>
+              <a:t>Responsabilidades compartidas: Gestión de Scrum Master, aseguramiento de calidad (QA) cruzado y desarrollo colaborativo en un flujo coordinado mediante Git y GitHub.</a:t>
+            </a:r>
+            <a:endParaRPr sz="1300">
+              <a:solidFill>
+                <a:schemeClr val="accent1"/>
+              </a:solidFill>
+              <a:latin typeface="Lato"/>
+              <a:ea typeface="Lato"/>
+              <a:cs typeface="Lato"/>
+              <a:sym typeface="Lato"/>
+            </a:endParaRPr>
+          </a:p>
+        </p:txBody>
+      </p:sp>
     </p:spTree>
   </p:cSld>
   <p:clrMapOvr>
@@ -12496,7 +13248,7 @@
   <p:cSld>
     <p:spTree>
       <p:nvGrpSpPr>
-        <p:cNvPr id="154" name="Shape 154"/>
+        <p:cNvPr id="152" name="Shape 152"/>
         <p:cNvGrpSpPr/>
         <p:nvPr/>
       </p:nvGrpSpPr>
@@ -12510,7 +13262,7 @@
       </p:grpSpPr>
       <p:pic>
         <p:nvPicPr>
-          <p:cNvPr id="155" name="Google Shape;155;p21"/>
+          <p:cNvPr id="153" name="Google Shape;153;p21"/>
           <p:cNvPicPr preferRelativeResize="0"/>
           <p:nvPr/>
         </p:nvPicPr>
@@ -12538,7 +13290,7 @@
       </p:pic>
       <p:sp>
         <p:nvSpPr>
-          <p:cNvPr id="156" name="Google Shape;156;p21"/>
+          <p:cNvPr id="154" name="Google Shape;154;p21"/>
           <p:cNvSpPr txBox="1"/>
           <p:nvPr>
             <p:ph type="title"/>
@@ -12570,11 +13322,7 @@
             </a:pPr>
             <a:r>
               <a:rPr lang="es"/>
-              <a:t>Arquitectura</a:t>
-            </a:r>
-            <a:r>
-              <a:rPr lang="es"/>
-              <a:t>	</a:t>
+              <a:t>Plan</a:t>
             </a:r>
             <a:endParaRPr/>
           </a:p>
@@ -12585,151 +13333,6 @@
               </a:spcBef>
               <a:spcAft>
                 <a:spcPts val="0"/>
-              </a:spcAft>
-              <a:buNone/>
-            </a:pPr>
-            <a:r>
-              <a:t/>
-            </a:r>
-            <a:endParaRPr/>
-          </a:p>
-        </p:txBody>
-      </p:sp>
-      <p:sp>
-        <p:nvSpPr>
-          <p:cNvPr id="157" name="Google Shape;157;p21"/>
-          <p:cNvSpPr txBox="1"/>
-          <p:nvPr>
-            <p:ph idx="1" type="body"/>
-          </p:nvPr>
-        </p:nvSpPr>
-        <p:spPr>
-          <a:xfrm>
-            <a:off x="608175" y="1291200"/>
-            <a:ext cx="3215700" cy="3407400"/>
-          </a:xfrm>
-          <a:prstGeom prst="rect">
-            <a:avLst/>
-          </a:prstGeom>
-        </p:spPr>
-        <p:txBody>
-          <a:bodyPr anchorCtr="0" anchor="ctr" bIns="91425" lIns="91425" spcFirstLastPara="1" rIns="91425" wrap="square" tIns="91425">
-            <a:normAutofit/>
-          </a:bodyPr>
-          <a:lstStyle/>
-          <a:p>
-            <a:pPr indent="0" lvl="0" marL="457200" rtl="0" algn="l">
-              <a:lnSpc>
-                <a:spcPct val="100000"/>
-              </a:lnSpc>
-              <a:spcBef>
-                <a:spcPts val="1000"/>
-              </a:spcBef>
-              <a:spcAft>
-                <a:spcPts val="0"/>
-              </a:spcAft>
-              <a:buNone/>
-            </a:pPr>
-            <a:r>
-              <a:t/>
-            </a:r>
-            <a:endParaRPr sz="1600"/>
-          </a:p>
-          <a:p>
-            <a:pPr indent="-330200" lvl="0" marL="457200" rtl="0" algn="l">
-              <a:lnSpc>
-                <a:spcPct val="150000"/>
-              </a:lnSpc>
-              <a:spcBef>
-                <a:spcPts val="0"/>
-              </a:spcBef>
-              <a:spcAft>
-                <a:spcPts val="0"/>
-              </a:spcAft>
-              <a:buSzPts val="1600"/>
-              <a:buChar char="●"/>
-            </a:pPr>
-            <a:r>
-              <a:rPr lang="es" sz="1600"/>
-              <a:t>Frontend</a:t>
-            </a:r>
-            <a:endParaRPr sz="1600"/>
-          </a:p>
-          <a:p>
-            <a:pPr indent="-330200" lvl="0" marL="457200" rtl="0" algn="l">
-              <a:lnSpc>
-                <a:spcPct val="150000"/>
-              </a:lnSpc>
-              <a:spcBef>
-                <a:spcPts val="0"/>
-              </a:spcBef>
-              <a:spcAft>
-                <a:spcPts val="0"/>
-              </a:spcAft>
-              <a:buSzPts val="1600"/>
-              <a:buChar char="●"/>
-            </a:pPr>
-            <a:r>
-              <a:rPr lang="es" sz="1600"/>
-              <a:t>Lógica</a:t>
-            </a:r>
-            <a:r>
-              <a:rPr lang="es" sz="1600"/>
-              <a:t> y </a:t>
-            </a:r>
-            <a:r>
-              <a:rPr lang="es" sz="1600"/>
-              <a:t>Validación</a:t>
-            </a:r>
-            <a:endParaRPr sz="1600"/>
-          </a:p>
-          <a:p>
-            <a:pPr indent="-330200" lvl="0" marL="457200" rtl="0" algn="l">
-              <a:lnSpc>
-                <a:spcPct val="150000"/>
-              </a:lnSpc>
-              <a:spcBef>
-                <a:spcPts val="0"/>
-              </a:spcBef>
-              <a:spcAft>
-                <a:spcPts val="0"/>
-              </a:spcAft>
-              <a:buSzPts val="1600"/>
-              <a:buChar char="●"/>
-            </a:pPr>
-            <a:r>
-              <a:rPr lang="es" sz="1600"/>
-              <a:t>Persistencia</a:t>
-            </a:r>
-            <a:endParaRPr sz="1600"/>
-          </a:p>
-          <a:p>
-            <a:pPr indent="-330200" lvl="0" marL="457200" rtl="0" algn="l">
-              <a:lnSpc>
-                <a:spcPct val="150000"/>
-              </a:lnSpc>
-              <a:spcBef>
-                <a:spcPts val="0"/>
-              </a:spcBef>
-              <a:spcAft>
-                <a:spcPts val="0"/>
-              </a:spcAft>
-              <a:buSzPts val="1600"/>
-              <a:buChar char="●"/>
-            </a:pPr>
-            <a:r>
-              <a:rPr lang="es" sz="1600"/>
-              <a:t>Seguridad e Identidad</a:t>
-            </a:r>
-            <a:endParaRPr sz="1600"/>
-          </a:p>
-          <a:p>
-            <a:pPr indent="0" lvl="0" marL="0" rtl="0" algn="l">
-              <a:spcBef>
-                <a:spcPts val="1200"/>
-              </a:spcBef>
-              <a:spcAft>
-                <a:spcPts val="1200"/>
               </a:spcAft>
               <a:buNone/>
             </a:pPr>
@@ -12742,7 +13345,7 @@
       </p:sp>
       <p:pic>
         <p:nvPicPr>
-          <p:cNvPr id="158" name="Google Shape;158;p21"/>
+          <p:cNvPr id="155" name="Google Shape;155;p21"/>
           <p:cNvPicPr preferRelativeResize="0"/>
           <p:nvPr/>
         </p:nvPicPr>
@@ -12756,8 +13359,8 @@
         </p:blipFill>
         <p:spPr>
           <a:xfrm>
-            <a:off x="6823351" y="756001"/>
-            <a:ext cx="1471350" cy="1471350"/>
+            <a:off x="342100" y="1345225"/>
+            <a:ext cx="4294342" cy="3547500"/>
           </a:xfrm>
           <a:prstGeom prst="rect">
             <a:avLst/>
@@ -12770,7 +13373,7 @@
       </p:pic>
       <p:pic>
         <p:nvPicPr>
-          <p:cNvPr id="159" name="Google Shape;159;p21"/>
+          <p:cNvPr id="156" name="Google Shape;156;p21"/>
           <p:cNvPicPr preferRelativeResize="0"/>
           <p:nvPr/>
         </p:nvPicPr>
@@ -12784,8 +13387,8 @@
         </p:blipFill>
         <p:spPr>
           <a:xfrm>
-            <a:off x="7548226" y="1955800"/>
-            <a:ext cx="746475" cy="615951"/>
+            <a:off x="4636450" y="1653925"/>
+            <a:ext cx="4202749" cy="3197274"/>
           </a:xfrm>
           <a:prstGeom prst="rect">
             <a:avLst/>
@@ -12798,7 +13401,7 @@
       </p:pic>
       <p:pic>
         <p:nvPicPr>
-          <p:cNvPr id="160" name="Google Shape;160;p21"/>
+          <p:cNvPr id="157" name="Google Shape;157;p21"/>
           <p:cNvPicPr preferRelativeResize="0"/>
           <p:nvPr/>
         </p:nvPicPr>
@@ -12812,120 +13415,8 @@
         </p:blipFill>
         <p:spPr>
           <a:xfrm>
-            <a:off x="6704823" y="1955790"/>
-            <a:ext cx="615950" cy="615950"/>
-          </a:xfrm>
-          <a:prstGeom prst="rect">
-            <a:avLst/>
-          </a:prstGeom>
-          <a:noFill/>
-          <a:ln>
-            <a:noFill/>
-          </a:ln>
-        </p:spPr>
-      </p:pic>
-      <p:pic>
-        <p:nvPicPr>
-          <p:cNvPr id="161" name="Google Shape;161;p21"/>
-          <p:cNvPicPr preferRelativeResize="0"/>
-          <p:nvPr/>
-        </p:nvPicPr>
-        <p:blipFill>
-          <a:blip r:embed="rId7">
-            <a:alphaModFix/>
-          </a:blip>
-          <a:stretch>
-            <a:fillRect/>
-          </a:stretch>
-        </p:blipFill>
-        <p:spPr>
-          <a:xfrm>
-            <a:off x="6704827" y="3092630"/>
-            <a:ext cx="615950" cy="635195"/>
-          </a:xfrm>
-          <a:prstGeom prst="rect">
-            <a:avLst/>
-          </a:prstGeom>
-          <a:noFill/>
-          <a:ln>
-            <a:noFill/>
-          </a:ln>
-        </p:spPr>
-      </p:pic>
-      <p:pic>
-        <p:nvPicPr>
-          <p:cNvPr id="162" name="Google Shape;162;p21"/>
-          <p:cNvPicPr preferRelativeResize="0"/>
-          <p:nvPr/>
-        </p:nvPicPr>
-        <p:blipFill>
-          <a:blip r:embed="rId8">
-            <a:alphaModFix/>
-          </a:blip>
-          <a:stretch>
-            <a:fillRect/>
-          </a:stretch>
-        </p:blipFill>
-        <p:spPr>
-          <a:xfrm>
-            <a:off x="7444149" y="3164840"/>
-            <a:ext cx="1166301" cy="490750"/>
-          </a:xfrm>
-          <a:prstGeom prst="rect">
-            <a:avLst/>
-          </a:prstGeom>
-          <a:noFill/>
-          <a:ln>
-            <a:noFill/>
-          </a:ln>
-        </p:spPr>
-      </p:pic>
-      <p:pic>
-        <p:nvPicPr>
-          <p:cNvPr id="163" name="Google Shape;163;p21"/>
-          <p:cNvPicPr preferRelativeResize="0"/>
-          <p:nvPr/>
-        </p:nvPicPr>
-        <p:blipFill>
-          <a:blip r:embed="rId9">
-            <a:alphaModFix/>
-          </a:blip>
-          <a:stretch>
-            <a:fillRect/>
-          </a:stretch>
-        </p:blipFill>
-        <p:spPr>
-          <a:xfrm>
-            <a:off x="6672201" y="4067962"/>
-            <a:ext cx="681200" cy="752037"/>
-          </a:xfrm>
-          <a:prstGeom prst="rect">
-            <a:avLst/>
-          </a:prstGeom>
-          <a:noFill/>
-          <a:ln>
-            <a:noFill/>
-          </a:ln>
-        </p:spPr>
-      </p:pic>
-      <p:pic>
-        <p:nvPicPr>
-          <p:cNvPr id="164" name="Google Shape;164;p21"/>
-          <p:cNvPicPr preferRelativeResize="0"/>
-          <p:nvPr/>
-        </p:nvPicPr>
-        <p:blipFill>
-          <a:blip r:embed="rId10">
-            <a:alphaModFix/>
-          </a:blip>
-          <a:stretch>
-            <a:fillRect/>
-          </a:stretch>
-        </p:blipFill>
-        <p:spPr>
-          <a:xfrm>
-            <a:off x="7686701" y="4102572"/>
-            <a:ext cx="681200" cy="682803"/>
+            <a:off x="4695200" y="1345225"/>
+            <a:ext cx="4105901" cy="365050"/>
           </a:xfrm>
           <a:prstGeom prst="rect">
             <a:avLst/>
@@ -12945,6 +13436,285 @@
 </file>
 
 <file path=ppt/theme/theme1.xml><?xml version="1.0" encoding="utf-8"?>
+<a:theme xmlns:a="http://schemas.openxmlformats.org/drawingml/2006/main" xmlns:r="http://schemas.openxmlformats.org/officeDocument/2006/relationships" name="Streamline">
+  <a:themeElements>
+    <a:clrScheme name="Streamline">
+      <a:dk1>
+        <a:srgbClr val="1A9988"/>
+      </a:dk1>
+      <a:lt1>
+        <a:srgbClr val="FFFFFF"/>
+      </a:lt1>
+      <a:dk2>
+        <a:srgbClr val="1A1A1A"/>
+      </a:dk2>
+      <a:lt2>
+        <a:srgbClr val="E9EDEE"/>
+      </a:lt2>
+      <a:accent1>
+        <a:srgbClr val="595959"/>
+      </a:accent1>
+      <a:accent2>
+        <a:srgbClr val="6AA4C8"/>
+      </a:accent2>
+      <a:accent3>
+        <a:srgbClr val="EB5600"/>
+      </a:accent3>
+      <a:accent4>
+        <a:srgbClr val="A2FFE8"/>
+      </a:accent4>
+      <a:accent5>
+        <a:srgbClr val="1C3678"/>
+      </a:accent5>
+      <a:accent6>
+        <a:srgbClr val="FFB8A2"/>
+      </a:accent6>
+      <a:hlink>
+        <a:srgbClr val="1C3678"/>
+      </a:hlink>
+      <a:folHlink>
+        <a:srgbClr val="1C3678"/>
+      </a:folHlink>
+    </a:clrScheme>
+    <a:fontScheme name="Office">
+      <a:majorFont>
+        <a:latin typeface="Arial"/>
+        <a:ea typeface=""/>
+        <a:cs typeface=""/>
+        <a:font script="Jpan" typeface="ＭＳ Ｐゴシック"/>
+        <a:font script="Hang" typeface="맑은 고딕"/>
+        <a:font script="Hans" typeface="宋体"/>
+        <a:font script="Hant" typeface="新細明體"/>
+        <a:font script="Arab" typeface="Times New Roman"/>
+        <a:font script="Hebr" typeface="Times New Roman"/>
+        <a:font script="Thai" typeface="Angsana New"/>
+        <a:font script="Ethi" typeface="Nyala"/>
+        <a:font script="Beng" typeface="Vrinda"/>
+        <a:font script="Gujr" typeface="Shruti"/>
+        <a:font script="Khmr" typeface="MoolBoran"/>
+        <a:font script="Knda" typeface="Tunga"/>
+        <a:font script="Guru" typeface="Raavi"/>
+        <a:font script="Cans" typeface="Euphemia"/>
+        <a:font script="Cher" typeface="Plantagenet Cherokee"/>
+        <a:font script="Yiii" typeface="Microsoft Yi Baiti"/>
+        <a:font script="Tibt" typeface="Microsoft Himalaya"/>
+        <a:font script="Thaa" typeface="MV Boli"/>
+        <a:font script="Deva" typeface="Mangal"/>
+        <a:font script="Telu" typeface="Gautami"/>
+        <a:font script="Taml" typeface="Latha"/>
+        <a:font script="Syrc" typeface="Estrangelo Edessa"/>
+        <a:font script="Orya" typeface="Kalinga"/>
+        <a:font script="Mlym" typeface="Kartika"/>
+        <a:font script="Laoo" typeface="DokChampa"/>
+        <a:font script="Sinh" typeface="Iskoola Pota"/>
+        <a:font script="Mong" typeface="Mongolian Baiti"/>
+        <a:font script="Viet" typeface="Times New Roman"/>
+        <a:font script="Uigh" typeface="Microsoft Uighur"/>
+        <a:font script="Geor" typeface="Sylfaen"/>
+      </a:majorFont>
+      <a:minorFont>
+        <a:latin typeface="Arial"/>
+        <a:ea typeface=""/>
+        <a:cs typeface=""/>
+        <a:font script="Jpan" typeface="ＭＳ Ｐゴシック"/>
+        <a:font script="Hang" typeface="맑은 고딕"/>
+        <a:font script="Hans" typeface="宋体"/>
+        <a:font script="Hant" typeface="新細明體"/>
+        <a:font script="Arab" typeface="Arial"/>
+        <a:font script="Hebr" typeface="Arial"/>
+        <a:font script="Thai" typeface="Cordia New"/>
+        <a:font script="Ethi" typeface="Nyala"/>
+        <a:font script="Beng" typeface="Vrinda"/>
+        <a:font script="Gujr" typeface="Shruti"/>
+        <a:font script="Khmr" typeface="DaunPenh"/>
+        <a:font script="Knda" typeface="Tunga"/>
+        <a:font script="Guru" typeface="Raavi"/>
+        <a:font script="Cans" typeface="Euphemia"/>
+        <a:font script="Cher" typeface="Plantagenet Cherokee"/>
+        <a:font script="Yiii" typeface="Microsoft Yi Baiti"/>
+        <a:font script="Tibt" typeface="Microsoft Himalaya"/>
+        <a:font script="Thaa" typeface="MV Boli"/>
+        <a:font script="Deva" typeface="Mangal"/>
+        <a:font script="Telu" typeface="Gautami"/>
+        <a:font script="Taml" typeface="Latha"/>
+        <a:font script="Syrc" typeface="Estrangelo Edessa"/>
+        <a:font script="Orya" typeface="Kalinga"/>
+        <a:font script="Mlym" typeface="Kartika"/>
+        <a:font script="Laoo" typeface="DokChampa"/>
+        <a:font script="Sinh" typeface="Iskoola Pota"/>
+        <a:font script="Mong" typeface="Mongolian Baiti"/>
+        <a:font script="Viet" typeface="Arial"/>
+        <a:font script="Uigh" typeface="Microsoft Uighur"/>
+        <a:font script="Geor" typeface="Sylfaen"/>
+      </a:minorFont>
+    </a:fontScheme>
+    <a:fmtScheme name="Office">
+      <a:fillStyleLst>
+        <a:solidFill>
+          <a:schemeClr val="phClr"/>
+        </a:solidFill>
+        <a:gradFill rotWithShape="1">
+          <a:gsLst>
+            <a:gs pos="0">
+              <a:schemeClr val="phClr">
+                <a:tint val="50000"/>
+                <a:satMod val="300000"/>
+              </a:schemeClr>
+            </a:gs>
+            <a:gs pos="35000">
+              <a:schemeClr val="phClr">
+                <a:tint val="37000"/>
+                <a:satMod val="300000"/>
+              </a:schemeClr>
+            </a:gs>
+            <a:gs pos="100000">
+              <a:schemeClr val="phClr">
+                <a:tint val="15000"/>
+                <a:satMod val="350000"/>
+              </a:schemeClr>
+            </a:gs>
+          </a:gsLst>
+          <a:lin ang="16200000" scaled="1"/>
+        </a:gradFill>
+        <a:gradFill rotWithShape="1">
+          <a:gsLst>
+            <a:gs pos="0">
+              <a:schemeClr val="phClr">
+                <a:tint val="100000"/>
+                <a:shade val="100000"/>
+                <a:satMod val="130000"/>
+              </a:schemeClr>
+            </a:gs>
+            <a:gs pos="100000">
+              <a:schemeClr val="phClr">
+                <a:tint val="50000"/>
+                <a:shade val="100000"/>
+                <a:satMod val="350000"/>
+              </a:schemeClr>
+            </a:gs>
+          </a:gsLst>
+          <a:lin ang="16200000" scaled="0"/>
+        </a:gradFill>
+      </a:fillStyleLst>
+      <a:lnStyleLst>
+        <a:ln w="9525" cap="flat" cmpd="sng" algn="ctr">
+          <a:solidFill>
+            <a:schemeClr val="phClr">
+              <a:shade val="95000"/>
+              <a:satMod val="105000"/>
+            </a:schemeClr>
+          </a:solidFill>
+          <a:prstDash val="solid"/>
+        </a:ln>
+        <a:ln w="25400" cap="flat" cmpd="sng" algn="ctr">
+          <a:solidFill>
+            <a:schemeClr val="phClr"/>
+          </a:solidFill>
+          <a:prstDash val="solid"/>
+        </a:ln>
+        <a:ln w="38100" cap="flat" cmpd="sng" algn="ctr">
+          <a:solidFill>
+            <a:schemeClr val="phClr"/>
+          </a:solidFill>
+          <a:prstDash val="solid"/>
+        </a:ln>
+      </a:lnStyleLst>
+      <a:effectStyleLst>
+        <a:effectStyle>
+          <a:effectLst>
+            <a:outerShdw blurRad="40000" dist="20000" dir="5400000" rotWithShape="0">
+              <a:srgbClr val="000000">
+                <a:alpha val="38000"/>
+              </a:srgbClr>
+            </a:outerShdw>
+          </a:effectLst>
+        </a:effectStyle>
+        <a:effectStyle>
+          <a:effectLst>
+            <a:outerShdw blurRad="40000" dist="23000" dir="5400000" rotWithShape="0">
+              <a:srgbClr val="000000">
+                <a:alpha val="35000"/>
+              </a:srgbClr>
+            </a:outerShdw>
+          </a:effectLst>
+        </a:effectStyle>
+        <a:effectStyle>
+          <a:effectLst>
+            <a:outerShdw blurRad="40000" dist="23000" dir="5400000" rotWithShape="0">
+              <a:srgbClr val="000000">
+                <a:alpha val="35000"/>
+              </a:srgbClr>
+            </a:outerShdw>
+          </a:effectLst>
+          <a:scene3d>
+            <a:camera prst="orthographicFront">
+              <a:rot lat="0" lon="0" rev="0"/>
+            </a:camera>
+            <a:lightRig rig="threePt" dir="t">
+              <a:rot lat="0" lon="0" rev="1200000"/>
+            </a:lightRig>
+          </a:scene3d>
+          <a:sp3d>
+            <a:bevelT w="63500" h="25400"/>
+          </a:sp3d>
+        </a:effectStyle>
+      </a:effectStyleLst>
+      <a:bgFillStyleLst>
+        <a:solidFill>
+          <a:schemeClr val="phClr"/>
+        </a:solidFill>
+        <a:gradFill rotWithShape="1">
+          <a:gsLst>
+            <a:gs pos="0">
+              <a:schemeClr val="phClr">
+                <a:tint val="40000"/>
+                <a:satMod val="350000"/>
+              </a:schemeClr>
+            </a:gs>
+            <a:gs pos="40000">
+              <a:schemeClr val="phClr">
+                <a:tint val="45000"/>
+                <a:shade val="99000"/>
+                <a:satMod val="350000"/>
+              </a:schemeClr>
+            </a:gs>
+            <a:gs pos="100000">
+              <a:schemeClr val="phClr">
+                <a:shade val="20000"/>
+                <a:satMod val="255000"/>
+              </a:schemeClr>
+            </a:gs>
+          </a:gsLst>
+          <a:path path="circle">
+            <a:fillToRect l="50000" t="-80000" r="50000" b="180000"/>
+          </a:path>
+        </a:gradFill>
+        <a:gradFill rotWithShape="1">
+          <a:gsLst>
+            <a:gs pos="0">
+              <a:schemeClr val="phClr">
+                <a:tint val="80000"/>
+                <a:satMod val="300000"/>
+              </a:schemeClr>
+            </a:gs>
+            <a:gs pos="100000">
+              <a:schemeClr val="phClr">
+                <a:shade val="30000"/>
+                <a:satMod val="200000"/>
+              </a:schemeClr>
+            </a:gs>
+          </a:gsLst>
+          <a:path path="circle">
+            <a:fillToRect l="50000" t="50000" r="50000" b="50000"/>
+          </a:path>
+        </a:gradFill>
+      </a:bgFillStyleLst>
+    </a:fmtScheme>
+  </a:themeElements>
+</a:theme>
+</file>
+
+<file path=ppt/theme/theme2.xml><?xml version="1.0" encoding="utf-8"?>
 <a:theme xmlns:a="http://schemas.openxmlformats.org/drawingml/2006/main" xmlns:r="http://schemas.openxmlformats.org/officeDocument/2006/relationships">
   <a:themeElements>
     <a:clrScheme name="Default">
@@ -13221,283 +13991,4 @@
     </a:fmtScheme>
   </a:themeElements>
 </a:theme>
-</file>
-
-<file path=ppt/theme/theme2.xml><?xml version="1.0" encoding="utf-8"?>
-<a:theme xmlns:a="http://schemas.openxmlformats.org/drawingml/2006/main" xmlns:r="http://schemas.openxmlformats.org/officeDocument/2006/relationships" name="Streamline">
-  <a:themeElements>
-    <a:clrScheme name="Streamline">
-      <a:dk1>
-        <a:srgbClr val="1A9988"/>
-      </a:dk1>
-      <a:lt1>
-        <a:srgbClr val="FFFFFF"/>
-      </a:lt1>
-      <a:dk2>
-        <a:srgbClr val="1A1A1A"/>
-      </a:dk2>
-      <a:lt2>
-        <a:srgbClr val="E9EDEE"/>
-      </a:lt2>
-      <a:accent1>
-        <a:srgbClr val="595959"/>
-      </a:accent1>
-      <a:accent2>
-        <a:srgbClr val="6AA4C8"/>
-      </a:accent2>
-      <a:accent3>
-        <a:srgbClr val="EB5600"/>
-      </a:accent3>
-      <a:accent4>
-        <a:srgbClr val="A2FFE8"/>
-      </a:accent4>
-      <a:accent5>
-        <a:srgbClr val="1C3678"/>
-      </a:accent5>
-      <a:accent6>
-        <a:srgbClr val="FFB8A2"/>
-      </a:accent6>
-      <a:hlink>
-        <a:srgbClr val="1C3678"/>
-      </a:hlink>
-      <a:folHlink>
-        <a:srgbClr val="1C3678"/>
-      </a:folHlink>
-    </a:clrScheme>
-    <a:fontScheme name="Office">
-      <a:majorFont>
-        <a:latin typeface="Arial"/>
-        <a:ea typeface=""/>
-        <a:cs typeface=""/>
-        <a:font script="Jpan" typeface="ＭＳ Ｐゴシック"/>
-        <a:font script="Hang" typeface="맑은 고딕"/>
-        <a:font script="Hans" typeface="宋体"/>
-        <a:font script="Hant" typeface="新細明體"/>
-        <a:font script="Arab" typeface="Times New Roman"/>
-        <a:font script="Hebr" typeface="Times New Roman"/>
-        <a:font script="Thai" typeface="Angsana New"/>
-        <a:font script="Ethi" typeface="Nyala"/>
-        <a:font script="Beng" typeface="Vrinda"/>
-        <a:font script="Gujr" typeface="Shruti"/>
-        <a:font script="Khmr" typeface="MoolBoran"/>
-        <a:font script="Knda" typeface="Tunga"/>
-        <a:font script="Guru" typeface="Raavi"/>
-        <a:font script="Cans" typeface="Euphemia"/>
-        <a:font script="Cher" typeface="Plantagenet Cherokee"/>
-        <a:font script="Yiii" typeface="Microsoft Yi Baiti"/>
-        <a:font script="Tibt" typeface="Microsoft Himalaya"/>
-        <a:font script="Thaa" typeface="MV Boli"/>
-        <a:font script="Deva" typeface="Mangal"/>
-        <a:font script="Telu" typeface="Gautami"/>
-        <a:font script="Taml" typeface="Latha"/>
-        <a:font script="Syrc" typeface="Estrangelo Edessa"/>
-        <a:font script="Orya" typeface="Kalinga"/>
-        <a:font script="Mlym" typeface="Kartika"/>
-        <a:font script="Laoo" typeface="DokChampa"/>
-        <a:font script="Sinh" typeface="Iskoola Pota"/>
-        <a:font script="Mong" typeface="Mongolian Baiti"/>
-        <a:font script="Viet" typeface="Times New Roman"/>
-        <a:font script="Uigh" typeface="Microsoft Uighur"/>
-        <a:font script="Geor" typeface="Sylfaen"/>
-      </a:majorFont>
-      <a:minorFont>
-        <a:latin typeface="Arial"/>
-        <a:ea typeface=""/>
-        <a:cs typeface=""/>
-        <a:font script="Jpan" typeface="ＭＳ Ｐゴシック"/>
-        <a:font script="Hang" typeface="맑은 고딕"/>
-        <a:font script="Hans" typeface="宋体"/>
-        <a:font script="Hant" typeface="新細明體"/>
-        <a:font script="Arab" typeface="Arial"/>
-        <a:font script="Hebr" typeface="Arial"/>
-        <a:font script="Thai" typeface="Cordia New"/>
-        <a:font script="Ethi" typeface="Nyala"/>
-        <a:font script="Beng" typeface="Vrinda"/>
-        <a:font script="Gujr" typeface="Shruti"/>
-        <a:font script="Khmr" typeface="DaunPenh"/>
-        <a:font script="Knda" typeface="Tunga"/>
-        <a:font script="Guru" typeface="Raavi"/>
-        <a:font script="Cans" typeface="Euphemia"/>
-        <a:font script="Cher" typeface="Plantagenet Cherokee"/>
-        <a:font script="Yiii" typeface="Microsoft Yi Baiti"/>
-        <a:font script="Tibt" typeface="Microsoft Himalaya"/>
-        <a:font script="Thaa" typeface="MV Boli"/>
-        <a:font script="Deva" typeface="Mangal"/>
-        <a:font script="Telu" typeface="Gautami"/>
-        <a:font script="Taml" typeface="Latha"/>
-        <a:font script="Syrc" typeface="Estrangelo Edessa"/>
-        <a:font script="Orya" typeface="Kalinga"/>
-        <a:font script="Mlym" typeface="Kartika"/>
-        <a:font script="Laoo" typeface="DokChampa"/>
-        <a:font script="Sinh" typeface="Iskoola Pota"/>
-        <a:font script="Mong" typeface="Mongolian Baiti"/>
-        <a:font script="Viet" typeface="Arial"/>
-        <a:font script="Uigh" typeface="Microsoft Uighur"/>
-        <a:font script="Geor" typeface="Sylfaen"/>
-      </a:minorFont>
-    </a:fontScheme>
-    <a:fmtScheme name="Office">
-      <a:fillStyleLst>
-        <a:solidFill>
-          <a:schemeClr val="phClr"/>
-        </a:solidFill>
-        <a:gradFill rotWithShape="1">
-          <a:gsLst>
-            <a:gs pos="0">
-              <a:schemeClr val="phClr">
-                <a:tint val="50000"/>
-                <a:satMod val="300000"/>
-              </a:schemeClr>
-            </a:gs>
-            <a:gs pos="35000">
-              <a:schemeClr val="phClr">
-                <a:tint val="37000"/>
-                <a:satMod val="300000"/>
-              </a:schemeClr>
-            </a:gs>
-            <a:gs pos="100000">
-              <a:schemeClr val="phClr">
-                <a:tint val="15000"/>
-                <a:satMod val="350000"/>
-              </a:schemeClr>
-            </a:gs>
-          </a:gsLst>
-          <a:lin ang="16200000" scaled="1"/>
-        </a:gradFill>
-        <a:gradFill rotWithShape="1">
-          <a:gsLst>
-            <a:gs pos="0">
-              <a:schemeClr val="phClr">
-                <a:tint val="100000"/>
-                <a:shade val="100000"/>
-                <a:satMod val="130000"/>
-              </a:schemeClr>
-            </a:gs>
-            <a:gs pos="100000">
-              <a:schemeClr val="phClr">
-                <a:tint val="50000"/>
-                <a:shade val="100000"/>
-                <a:satMod val="350000"/>
-              </a:schemeClr>
-            </a:gs>
-          </a:gsLst>
-          <a:lin ang="16200000" scaled="0"/>
-        </a:gradFill>
-      </a:fillStyleLst>
-      <a:lnStyleLst>
-        <a:ln w="9525" cap="flat" cmpd="sng" algn="ctr">
-          <a:solidFill>
-            <a:schemeClr val="phClr">
-              <a:shade val="95000"/>
-              <a:satMod val="105000"/>
-            </a:schemeClr>
-          </a:solidFill>
-          <a:prstDash val="solid"/>
-        </a:ln>
-        <a:ln w="25400" cap="flat" cmpd="sng" algn="ctr">
-          <a:solidFill>
-            <a:schemeClr val="phClr"/>
-          </a:solidFill>
-          <a:prstDash val="solid"/>
-        </a:ln>
-        <a:ln w="38100" cap="flat" cmpd="sng" algn="ctr">
-          <a:solidFill>
-            <a:schemeClr val="phClr"/>
-          </a:solidFill>
-          <a:prstDash val="solid"/>
-        </a:ln>
-      </a:lnStyleLst>
-      <a:effectStyleLst>
-        <a:effectStyle>
-          <a:effectLst>
-            <a:outerShdw blurRad="40000" dist="20000" dir="5400000" rotWithShape="0">
-              <a:srgbClr val="000000">
-                <a:alpha val="38000"/>
-              </a:srgbClr>
-            </a:outerShdw>
-          </a:effectLst>
-        </a:effectStyle>
-        <a:effectStyle>
-          <a:effectLst>
-            <a:outerShdw blurRad="40000" dist="23000" dir="5400000" rotWithShape="0">
-              <a:srgbClr val="000000">
-                <a:alpha val="35000"/>
-              </a:srgbClr>
-            </a:outerShdw>
-          </a:effectLst>
-        </a:effectStyle>
-        <a:effectStyle>
-          <a:effectLst>
-            <a:outerShdw blurRad="40000" dist="23000" dir="5400000" rotWithShape="0">
-              <a:srgbClr val="000000">
-                <a:alpha val="35000"/>
-              </a:srgbClr>
-            </a:outerShdw>
-          </a:effectLst>
-          <a:scene3d>
-            <a:camera prst="orthographicFront">
-              <a:rot lat="0" lon="0" rev="0"/>
-            </a:camera>
-            <a:lightRig rig="threePt" dir="t">
-              <a:rot lat="0" lon="0" rev="1200000"/>
-            </a:lightRig>
-          </a:scene3d>
-          <a:sp3d>
-            <a:bevelT w="63500" h="25400"/>
-          </a:sp3d>
-        </a:effectStyle>
-      </a:effectStyleLst>
-      <a:bgFillStyleLst>
-        <a:solidFill>
-          <a:schemeClr val="phClr"/>
-        </a:solidFill>
-        <a:gradFill rotWithShape="1">
-          <a:gsLst>
-            <a:gs pos="0">
-              <a:schemeClr val="phClr">
-                <a:tint val="40000"/>
-                <a:satMod val="350000"/>
-              </a:schemeClr>
-            </a:gs>
-            <a:gs pos="40000">
-              <a:schemeClr val="phClr">
-                <a:tint val="45000"/>
-                <a:shade val="99000"/>
-                <a:satMod val="350000"/>
-              </a:schemeClr>
-            </a:gs>
-            <a:gs pos="100000">
-              <a:schemeClr val="phClr">
-                <a:shade val="20000"/>
-                <a:satMod val="255000"/>
-              </a:schemeClr>
-            </a:gs>
-          </a:gsLst>
-          <a:path path="circle">
-            <a:fillToRect l="50000" t="-80000" r="50000" b="180000"/>
-          </a:path>
-        </a:gradFill>
-        <a:gradFill rotWithShape="1">
-          <a:gsLst>
-            <a:gs pos="0">
-              <a:schemeClr val="phClr">
-                <a:tint val="80000"/>
-                <a:satMod val="300000"/>
-              </a:schemeClr>
-            </a:gs>
-            <a:gs pos="100000">
-              <a:schemeClr val="phClr">
-                <a:shade val="30000"/>
-                <a:satMod val="200000"/>
-              </a:schemeClr>
-            </a:gs>
-          </a:gsLst>
-          <a:path path="circle">
-            <a:fillToRect l="50000" t="50000" r="50000" b="50000"/>
-          </a:path>
-        </a:gradFill>
-      </a:bgFillStyleLst>
-    </a:fmtScheme>
-  </a:themeElements>
-</a:theme>
 </file>